--- a/app/examples/retail_sales/report.pptx
+++ b/app/examples/retail_sales/report.pptx
@@ -3120,11 +3120,11 @@
             <a:r>
               <a:rPr sz="4600" b="1">
                 <a:solidFill>
-                  <a:srgbClr val="1F2A44"/>
+                  <a:srgbClr val="11243F"/>
                 </a:solidFill>
                 <a:latin typeface="Georgia"/>
               </a:rPr>
-              <a:t>May 2026 Revenue Insights</a:t>
+              <a:t>Revenue Growth and Channel Insights</a:t>
             </a:r>
           </a:p>
         </p:txBody>
@@ -3156,7 +3156,7 @@
                 <a:solidFill>
                   <a:srgbClr val="7A828C"/>
                 </a:solidFill>
-                <a:latin typeface="Arial"/>
+                <a:latin typeface="Calibri"/>
               </a:rPr>
               <a:t>Period 2026-05  |  source table: ex_retail_sales</a:t>
             </a:r>
@@ -3190,9 +3190,9 @@
                 <a:solidFill>
                   <a:srgbClr val="7A828C"/>
                 </a:solidFill>
-                <a:latin typeface="Arial"/>
-              </a:rPr>
-              <a:t>Generated 2026-06-10 15:43 UTC   |   CONFIDENTIAL</a:t>
+                <a:latin typeface="Calibri"/>
+              </a:rPr>
+              <a:t>Generated 2026-06-10 17:36 UTC   |   CONFIDENTIAL</a:t>
             </a:r>
           </a:p>
         </p:txBody>
@@ -3242,7 +3242,7 @@
                 <a:solidFill>
                   <a:srgbClr val="2E6DB4"/>
                 </a:solidFill>
-                <a:latin typeface="Arial"/>
+                <a:latin typeface="Calibri"/>
               </a:rPr>
               <a:t>EXECUTIVE SUMMARY</a:t>
             </a:r>
@@ -3274,11 +3274,11 @@
             <a:r>
               <a:rPr sz="3000" b="1">
                 <a:solidFill>
-                  <a:srgbClr val="1F2A44"/>
+                  <a:srgbClr val="11243F"/>
                 </a:solidFill>
                 <a:latin typeface="Georgia"/>
               </a:rPr>
-              <a:t>Strong growth in total revenue signals positive market trends.</a:t>
+              <a:t>Sustained revenue growth highlights key opportunities in online sales and electronics.</a:t>
             </a:r>
           </a:p>
         </p:txBody>
@@ -3310,7 +3310,7 @@
                 <a:solidFill>
                   <a:srgbClr val="7A828C"/>
                 </a:solidFill>
-                <a:latin typeface="Arial"/>
+                <a:latin typeface="Calibri"/>
               </a:rPr>
               <a:t>Source: figures verified against the source data.</a:t>
             </a:r>
@@ -3357,9 +3357,9 @@
                 <a:solidFill>
                   <a:srgbClr val="3C4450"/>
                 </a:solidFill>
-                <a:latin typeface="Arial"/>
-              </a:rPr>
-              <a:t>Total revenue reached $998k in May 2026, reflecting a growth of +4.5%.</a:t>
+                <a:latin typeface="Calibri"/>
+              </a:rPr>
+              <a:t>Total revenue reached $998k in 2026-05, reflecting a positive growth of +4.5%.</a:t>
             </a:r>
           </a:p>
           <a:p>
@@ -3381,7 +3381,7 @@
                 <a:solidFill>
                   <a:srgbClr val="3C4450"/>
                 </a:solidFill>
-                <a:latin typeface="Arial"/>
+                <a:latin typeface="Calibri"/>
               </a:rPr>
               <a:t>North America generated $262k, accounting for 26.2% of total revenue.</a:t>
             </a:r>
@@ -3405,7 +3405,7 @@
                 <a:solidFill>
                   <a:srgbClr val="3C4450"/>
                 </a:solidFill>
-                <a:latin typeface="Arial"/>
+                <a:latin typeface="Calibri"/>
               </a:rPr>
               <a:t>Online sales led with $537k, representing 53.8% of total revenue.</a:t>
             </a:r>
@@ -3429,9 +3429,9 @@
                 <a:solidFill>
                   <a:srgbClr val="3C4450"/>
                 </a:solidFill>
-                <a:latin typeface="Arial"/>
-              </a:rPr>
-              <a:t>Electronics category sales totaled $293k, making up 29.4% of total revenue.</a:t>
+                <a:latin typeface="Calibri"/>
+              </a:rPr>
+              <a:t>Electronics category generated $293k, making up 29.4% of total revenue.</a:t>
             </a:r>
           </a:p>
           <a:p>
@@ -3453,9 +3453,9 @@
                 <a:solidFill>
                   <a:srgbClr val="3C4450"/>
                 </a:solidFill>
-                <a:latin typeface="Arial"/>
-              </a:rPr>
-              <a:t>The Coffee Grinder experienced a decline of -$2k compared to the previous month.</a:t>
+                <a:latin typeface="Calibri"/>
+              </a:rPr>
+              <a:t>Coffee Grinder sales declined by -$2k compared to the prior month.</a:t>
             </a:r>
           </a:p>
         </p:txBody>
@@ -3505,7 +3505,7 @@
                 <a:solidFill>
                   <a:srgbClr val="2E6DB4"/>
                 </a:solidFill>
-                <a:latin typeface="Arial"/>
+                <a:latin typeface="Calibri"/>
               </a:rPr>
               <a:t>FINANCIAL PERFORMANCE</a:t>
             </a:r>
@@ -3537,11 +3537,11 @@
             <a:r>
               <a:rPr sz="3000" b="1">
                 <a:solidFill>
-                  <a:srgbClr val="1F2A44"/>
+                  <a:srgbClr val="11243F"/>
                 </a:solidFill>
                 <a:latin typeface="Georgia"/>
               </a:rPr>
-              <a:t>Total revenue increased to $998k in May, up $43k from April.</a:t>
+              <a:t>Total revenue increased to $998k in 2026-05, up $43k from April.</a:t>
             </a:r>
           </a:p>
         </p:txBody>
@@ -3573,7 +3573,7 @@
                 <a:solidFill>
                   <a:srgbClr val="7A828C"/>
                 </a:solidFill>
-                <a:latin typeface="Arial"/>
+                <a:latin typeface="Calibri"/>
               </a:rPr>
               <a:t>Source: performance: Monthly revenue, verified against the data.</a:t>
             </a:r>
@@ -3631,9 +3631,9 @@
                 <a:solidFill>
                   <a:srgbClr val="7A828C"/>
                 </a:solidFill>
-                <a:latin typeface="Arial"/>
-              </a:rPr>
-              <a:t>In May 2026, total revenue reached $998k, reflecting a 4.5% increase from April's $955k. This growth follows a recent upward trend, with revenue recovering from lower figures earlier in the year. The peak month remains December 2025, where revenue hit $1.41M, indicating potential seasonal patterns to capitalize on.</a:t>
+                <a:latin typeface="Calibri"/>
+              </a:rPr>
+              <a:t>In May 2026, total revenue reached $998k, reflecting a 4.5% increase from April's $955k. This growth continues the upward trend observed in recent months, with May's performance nearing the peak month of $1.41M. The recent trend indicates a recovery from lower revenue months earlier in the year, particularly February's low of $753k.</a:t>
             </a:r>
           </a:p>
         </p:txBody>
@@ -3653,7 +3653,7 @@
             <a:avLst/>
           </a:prstGeom>
           <a:solidFill>
-            <a:srgbClr val="1F2A44"/>
+            <a:srgbClr val="11243F"/>
           </a:solidFill>
           <a:ln>
             <a:noFill/>
@@ -3684,7 +3684,7 @@
                 <a:solidFill>
                   <a:srgbClr val="FFFFFF"/>
                 </a:solidFill>
-                <a:latin typeface="Arial"/>
+                <a:latin typeface="Calibri"/>
               </a:rPr>
               <a:t>KEY TAKEAWAY</a:t>
             </a:r>
@@ -3743,9 +3743,9 @@
                 <a:solidFill>
                   <a:srgbClr val="3C4450"/>
                 </a:solidFill>
-                <a:latin typeface="Arial"/>
-              </a:rPr>
-              <a:t>Sustained growth in revenue suggests effective strategies are in place, warranting further investment.</a:t>
+                <a:latin typeface="Calibri"/>
+              </a:rPr>
+              <a:t>Sustained revenue growth signals positive momentum heading into the next quarter.</a:t>
             </a:r>
           </a:p>
           <a:p>
@@ -3759,9 +3759,9 @@
                 <a:solidFill>
                   <a:srgbClr val="3C4450"/>
                 </a:solidFill>
-                <a:latin typeface="Arial"/>
-              </a:rPr>
-              <a:t>•  May revenue of $998k marks a recovery from earlier lows.</a:t>
+                <a:latin typeface="Calibri"/>
+              </a:rPr>
+              <a:t>•  Revenue growth of $43k from April to May</a:t>
             </a:r>
           </a:p>
           <a:p>
@@ -3775,9 +3775,9 @@
                 <a:solidFill>
                   <a:srgbClr val="3C4450"/>
                 </a:solidFill>
-                <a:latin typeface="Arial"/>
-              </a:rPr>
-              <a:t>•  Recent months show a positive trend after February's dip to $753k.</a:t>
+                <a:latin typeface="Calibri"/>
+              </a:rPr>
+              <a:t>•  Recent trend shows recovery from February's low</a:t>
             </a:r>
           </a:p>
           <a:p>
@@ -3791,9 +3791,9 @@
                 <a:solidFill>
                   <a:srgbClr val="3C4450"/>
                 </a:solidFill>
-                <a:latin typeface="Arial"/>
-              </a:rPr>
-              <a:t>•  December 2025 remains the peak month for revenue at $1.41M.</a:t>
+                <a:latin typeface="Calibri"/>
+              </a:rPr>
+              <a:t>•  May revenue approaches peak of $1.41M</a:t>
             </a:r>
           </a:p>
         </p:txBody>
@@ -3843,7 +3843,7 @@
                 <a:solidFill>
                   <a:srgbClr val="2E6DB4"/>
                 </a:solidFill>
-                <a:latin typeface="Arial"/>
+                <a:latin typeface="Calibri"/>
               </a:rPr>
               <a:t>REGION BREAKDOWN</a:t>
             </a:r>
@@ -3875,11 +3875,11 @@
             <a:r>
               <a:rPr sz="3000" b="1">
                 <a:solidFill>
-                  <a:srgbClr val="1F2A44"/>
+                  <a:srgbClr val="11243F"/>
                 </a:solidFill>
                 <a:latin typeface="Georgia"/>
               </a:rPr>
-              <a:t>North America leads with $262k, while EMEA grows by $14k.</a:t>
+              <a:t>North America leads with $262k, while EMEA grows by +$14k.</a:t>
             </a:r>
           </a:p>
         </p:txBody>
@@ -3911,7 +3911,7 @@
                 <a:solidFill>
                   <a:srgbClr val="7A828C"/>
                 </a:solidFill>
-                <a:latin typeface="Arial"/>
+                <a:latin typeface="Calibri"/>
               </a:rPr>
               <a:t>Source: dim_region: revenue by region (2026-05), verified against the data.</a:t>
             </a:r>
@@ -3969,9 +3969,9 @@
                 <a:solidFill>
                   <a:srgbClr val="7A828C"/>
                 </a:solidFill>
-                <a:latin typeface="Arial"/>
-              </a:rPr>
-              <a:t>In the revenue breakdown for 2026-05, North America stands out as the leading region with total revenue of $262k, accounting for 26.2% of the overall revenue. EMEA follows with $219k, showing significant growth of $14k compared to the previous period. The concentration remains high in North America, while EMEA's growth indicates a positive trend in that region.</a:t>
+                <a:latin typeface="Calibri"/>
+              </a:rPr>
+              <a:t>In the revenue breakdown for 2026-05, North America stands out with total revenue of $262k, making it the leading region. EMEA follows with $219k, showing a significant increase of +$14k from the previous period. The concentration of revenue indicates a strong performance in North America, while EMEA's growth highlights its emerging strength.</a:t>
             </a:r>
           </a:p>
         </p:txBody>
@@ -3991,7 +3991,7 @@
             <a:avLst/>
           </a:prstGeom>
           <a:solidFill>
-            <a:srgbClr val="1F2A44"/>
+            <a:srgbClr val="11243F"/>
           </a:solidFill>
           <a:ln>
             <a:noFill/>
@@ -4022,7 +4022,7 @@
                 <a:solidFill>
                   <a:srgbClr val="FFFFFF"/>
                 </a:solidFill>
-                <a:latin typeface="Arial"/>
+                <a:latin typeface="Calibri"/>
               </a:rPr>
               <a:t>KEY TAKEAWAY</a:t>
             </a:r>
@@ -4081,9 +4081,9 @@
                 <a:solidFill>
                   <a:srgbClr val="3C4450"/>
                 </a:solidFill>
-                <a:latin typeface="Arial"/>
-              </a:rPr>
-              <a:t>Focus on sustaining growth in EMEA while leveraging North America's strong performance.</a:t>
+                <a:latin typeface="Calibri"/>
+              </a:rPr>
+              <a:t>Focusing on EMEA's growth could enhance overall revenue performance.</a:t>
             </a:r>
           </a:p>
           <a:p>
@@ -4097,7 +4097,7 @@
                 <a:solidFill>
                   <a:srgbClr val="3C4450"/>
                 </a:solidFill>
-                <a:latin typeface="Arial"/>
+                <a:latin typeface="Calibri"/>
               </a:rPr>
               <a:t>•  North America: $262k, 26.2% of total revenue</a:t>
             </a:r>
@@ -4113,9 +4113,9 @@
                 <a:solidFill>
                   <a:srgbClr val="3C4450"/>
                 </a:solidFill>
-                <a:latin typeface="Arial"/>
-              </a:rPr>
-              <a:t>•  EMEA: $219k, up $14k from prior period</a:t>
+                <a:latin typeface="Calibri"/>
+              </a:rPr>
+              <a:t>•  EMEA: $219k, largest growth at +$14k</a:t>
             </a:r>
           </a:p>
           <a:p>
@@ -4129,9 +4129,9 @@
                 <a:solidFill>
                   <a:srgbClr val="3C4450"/>
                 </a:solidFill>
-                <a:latin typeface="Arial"/>
-              </a:rPr>
-              <a:t>•  UK &amp; Ireland: $200k, up $13k from prior period</a:t>
+                <a:latin typeface="Calibri"/>
+              </a:rPr>
+              <a:t>•  UK &amp; Ireland: $200k, also shows strong growth of +$13k</a:t>
             </a:r>
           </a:p>
         </p:txBody>
@@ -4181,7 +4181,7 @@
                 <a:solidFill>
                   <a:srgbClr val="2E6DB4"/>
                 </a:solidFill>
-                <a:latin typeface="Arial"/>
+                <a:latin typeface="Calibri"/>
               </a:rPr>
               <a:t>CHANNEL BREAKDOWN</a:t>
             </a:r>
@@ -4213,11 +4213,11 @@
             <a:r>
               <a:rPr sz="3000" b="1">
                 <a:solidFill>
-                  <a:srgbClr val="1F2A44"/>
+                  <a:srgbClr val="11243F"/>
                 </a:solidFill>
                 <a:latin typeface="Georgia"/>
               </a:rPr>
-              <a:t>Online leads with $537k, representing 53.8% of total revenue.</a:t>
+              <a:t>Online leads with $537k, driving a $35k increase from April to May.</a:t>
             </a:r>
           </a:p>
         </p:txBody>
@@ -4249,7 +4249,7 @@
                 <a:solidFill>
                   <a:srgbClr val="7A828C"/>
                 </a:solidFill>
-                <a:latin typeface="Arial"/>
+                <a:latin typeface="Calibri"/>
               </a:rPr>
               <a:t>Source: dim_channel: revenue by channel (2026-05), verified against the data.</a:t>
             </a:r>
@@ -4307,9 +4307,9 @@
                 <a:solidFill>
                   <a:srgbClr val="7A828C"/>
                 </a:solidFill>
-                <a:latin typeface="Arial"/>
-              </a:rPr>
-              <a:t>In May 2026, online sales generated $537k, leading all channels and accounting for 53.8% of total revenue. In-store sales followed with $461k, showing a solid contribution but significantly lower than online. The biggest mover was online, which increased by +$35k from the previous month, indicating strong growth momentum in this channel.</a:t>
+                <a:latin typeface="Calibri"/>
+              </a:rPr>
+              <a:t>In May 2026, Online channel revenue reached $537k, representing 53.8% of total revenue. In-store revenue followed at $461k, showing a smaller increase of $8k from the previous month. The Online channel not only leads in total revenue but also demonstrates significant growth compared to the prior period, highlighting a strong shift towards digital sales.</a:t>
             </a:r>
           </a:p>
         </p:txBody>
@@ -4329,7 +4329,7 @@
             <a:avLst/>
           </a:prstGeom>
           <a:solidFill>
-            <a:srgbClr val="1F2A44"/>
+            <a:srgbClr val="11243F"/>
           </a:solidFill>
           <a:ln>
             <a:noFill/>
@@ -4360,7 +4360,7 @@
                 <a:solidFill>
                   <a:srgbClr val="FFFFFF"/>
                 </a:solidFill>
-                <a:latin typeface="Arial"/>
+                <a:latin typeface="Calibri"/>
               </a:rPr>
               <a:t>KEY TAKEAWAY</a:t>
             </a:r>
@@ -4419,9 +4419,9 @@
                 <a:solidFill>
                   <a:srgbClr val="3C4450"/>
                 </a:solidFill>
-                <a:latin typeface="Arial"/>
-              </a:rPr>
-              <a:t>Focusing on online growth is essential as it drives the majority of revenue.</a:t>
+                <a:latin typeface="Calibri"/>
+              </a:rPr>
+              <a:t>The strong growth in Online revenue indicates a successful digital strategy that should be prioritized.</a:t>
             </a:r>
           </a:p>
           <a:p>
@@ -4435,9 +4435,9 @@
                 <a:solidFill>
                   <a:srgbClr val="3C4450"/>
                 </a:solidFill>
-                <a:latin typeface="Arial"/>
-              </a:rPr>
-              <a:t>•  Online revenue is $537k, leading with 53.8% share.</a:t>
+                <a:latin typeface="Calibri"/>
+              </a:rPr>
+              <a:t>•  Online revenue increased by $35k from April to May.</a:t>
             </a:r>
           </a:p>
           <a:p>
@@ -4451,9 +4451,9 @@
                 <a:solidFill>
                   <a:srgbClr val="3C4450"/>
                 </a:solidFill>
-                <a:latin typeface="Arial"/>
-              </a:rPr>
-              <a:t>•  In-store revenue stands at $461k, showing steady performance.</a:t>
+                <a:latin typeface="Calibri"/>
+              </a:rPr>
+              <a:t>•  In-store revenue rose by $8k in the same period.</a:t>
             </a:r>
           </a:p>
           <a:p>
@@ -4467,9 +4467,9 @@
                 <a:solidFill>
                   <a:srgbClr val="3C4450"/>
                 </a:solidFill>
-                <a:latin typeface="Arial"/>
-              </a:rPr>
-              <a:t>•  Online channel increased by +$35k compared to April 2026.</a:t>
+                <a:latin typeface="Calibri"/>
+              </a:rPr>
+              <a:t>•  Online accounts for over half of total revenue.</a:t>
             </a:r>
           </a:p>
         </p:txBody>
@@ -4519,7 +4519,7 @@
                 <a:solidFill>
                   <a:srgbClr val="2E6DB4"/>
                 </a:solidFill>
-                <a:latin typeface="Arial"/>
+                <a:latin typeface="Calibri"/>
               </a:rPr>
               <a:t>CATEGORY BREAKDOWN</a:t>
             </a:r>
@@ -4551,7 +4551,7 @@
             <a:r>
               <a:rPr sz="3000" b="1">
                 <a:solidFill>
-                  <a:srgbClr val="1F2A44"/>
+                  <a:srgbClr val="11243F"/>
                 </a:solidFill>
                 <a:latin typeface="Georgia"/>
               </a:rPr>
@@ -4587,7 +4587,7 @@
                 <a:solidFill>
                   <a:srgbClr val="7A828C"/>
                 </a:solidFill>
-                <a:latin typeface="Arial"/>
+                <a:latin typeface="Calibri"/>
               </a:rPr>
               <a:t>Source: dim_category: revenue by category (2026-05), verified against the data.</a:t>
             </a:r>
@@ -4645,9 +4645,9 @@
                 <a:solidFill>
                   <a:srgbClr val="7A828C"/>
                 </a:solidFill>
-                <a:latin typeface="Arial"/>
-              </a:rPr>
-              <a:t>In May 2026, Electronics generated $293k, making it the top category by total revenue. Home &amp; Kitchen follows closely with $279k, showing significant growth of +$24k compared to April 2026. The concentration of revenue is evident, as these two categories account for a substantial portion of the total revenue.</a:t>
+                <a:latin typeface="Calibri"/>
+              </a:rPr>
+              <a:t>In May 2026, Electronics dominates the revenue breakdown with $293k, accounting for 29.4% of total revenue. Home &amp; Kitchen follows closely with $279k, experiencing the largest increase of +$24k from the previous month. Beauty &amp; Wellness also shows a strong performance, growing by +$10k to reach $248k, indicating a healthy concentration in these top categories.</a:t>
             </a:r>
           </a:p>
         </p:txBody>
@@ -4667,7 +4667,7 @@
             <a:avLst/>
           </a:prstGeom>
           <a:solidFill>
-            <a:srgbClr val="1F2A44"/>
+            <a:srgbClr val="11243F"/>
           </a:solidFill>
           <a:ln>
             <a:noFill/>
@@ -4698,7 +4698,7 @@
                 <a:solidFill>
                   <a:srgbClr val="FFFFFF"/>
                 </a:solidFill>
-                <a:latin typeface="Arial"/>
+                <a:latin typeface="Calibri"/>
               </a:rPr>
               <a:t>KEY TAKEAWAY</a:t>
             </a:r>
@@ -4757,9 +4757,9 @@
                 <a:solidFill>
                   <a:srgbClr val="3C4450"/>
                 </a:solidFill>
-                <a:latin typeface="Arial"/>
-              </a:rPr>
-              <a:t>Focusing on Electronics and Home &amp; Kitchen can drive further revenue growth.</a:t>
+                <a:latin typeface="Calibri"/>
+              </a:rPr>
+              <a:t>Focusing on Electronics and Home &amp; Kitchen can drive future growth.</a:t>
             </a:r>
           </a:p>
           <a:p>
@@ -4773,9 +4773,9 @@
                 <a:solidFill>
                   <a:srgbClr val="3C4450"/>
                 </a:solidFill>
-                <a:latin typeface="Arial"/>
-              </a:rPr>
-              <a:t>•  Electronics: $293k, leading category</a:t>
+                <a:latin typeface="Calibri"/>
+              </a:rPr>
+              <a:t>•  Electronics contributes $293k, leading all categories.</a:t>
             </a:r>
           </a:p>
           <a:p>
@@ -4789,9 +4789,9 @@
                 <a:solidFill>
                   <a:srgbClr val="3C4450"/>
                 </a:solidFill>
-                <a:latin typeface="Arial"/>
-              </a:rPr>
-              <a:t>•  Home &amp; Kitchen: $279k, largest growth of +$24k</a:t>
+                <a:latin typeface="Calibri"/>
+              </a:rPr>
+              <a:t>•  Home &amp; Kitchen increases by +$24k, the largest mover.</a:t>
             </a:r>
           </a:p>
           <a:p>
@@ -4805,9 +4805,9 @@
                 <a:solidFill>
                   <a:srgbClr val="3C4450"/>
                 </a:solidFill>
-                <a:latin typeface="Arial"/>
-              </a:rPr>
-              <a:t>•  Beauty &amp; Wellness: $248k, steady increase of +$10k</a:t>
+                <a:latin typeface="Calibri"/>
+              </a:rPr>
+              <a:t>•  Beauty &amp; Wellness grows by +$10k, reflecting strong demand.</a:t>
             </a:r>
           </a:p>
         </p:txBody>
@@ -4857,7 +4857,7 @@
                 <a:solidFill>
                   <a:srgbClr val="2E6DB4"/>
                 </a:solidFill>
-                <a:latin typeface="Arial"/>
+                <a:latin typeface="Calibri"/>
               </a:rPr>
               <a:t>PRODUCT BREAKDOWN</a:t>
             </a:r>
@@ -4889,7 +4889,7 @@
             <a:r>
               <a:rPr sz="3000" b="1">
                 <a:solidFill>
-                  <a:srgbClr val="1F2A44"/>
+                  <a:srgbClr val="11243F"/>
                 </a:solidFill>
                 <a:latin typeface="Georgia"/>
               </a:rPr>
@@ -4925,7 +4925,7 @@
                 <a:solidFill>
                   <a:srgbClr val="7A828C"/>
                 </a:solidFill>
-                <a:latin typeface="Arial"/>
+                <a:latin typeface="Calibri"/>
               </a:rPr>
               <a:t>Source: dim_product: revenue by product (2026-05), verified against the data.</a:t>
             </a:r>
@@ -4983,9 +4983,9 @@
                 <a:solidFill>
                   <a:srgbClr val="7A828C"/>
                 </a:solidFill>
-                <a:latin typeface="Arial"/>
-              </a:rPr>
-              <a:t>In May 2026, Wireless Earbuds generated $163k, making it the top product and accounting for 16.4% of total revenue. The Air Fryer follows with $133k, showing strong performance but with a lower concentration. The biggest mover compared to April 2026 is the Air Fryer, which increased by $15k, reflecting growing consumer demand.</a:t>
+                <a:latin typeface="Calibri"/>
+              </a:rPr>
+              <a:t>In May 2026, Wireless Earbuds generated $163k, establishing itself as the top product and contributing 16.4% of total revenue. The Air Fryer follows closely with $133k, showing significant growth of +$15k from the previous month. The Cookware Set also performed well, increasing by +$12k to reach $106k, indicating strong demand in the kitchen appliance segment.</a:t>
             </a:r>
           </a:p>
         </p:txBody>
@@ -5005,7 +5005,7 @@
             <a:avLst/>
           </a:prstGeom>
           <a:solidFill>
-            <a:srgbClr val="1F2A44"/>
+            <a:srgbClr val="11243F"/>
           </a:solidFill>
           <a:ln>
             <a:noFill/>
@@ -5036,7 +5036,7 @@
                 <a:solidFill>
                   <a:srgbClr val="FFFFFF"/>
                 </a:solidFill>
-                <a:latin typeface="Arial"/>
+                <a:latin typeface="Calibri"/>
               </a:rPr>
               <a:t>KEY TAKEAWAY</a:t>
             </a:r>
@@ -5095,9 +5095,9 @@
                 <a:solidFill>
                   <a:srgbClr val="3C4450"/>
                 </a:solidFill>
-                <a:latin typeface="Arial"/>
-              </a:rPr>
-              <a:t>Focusing on high-performing products like Wireless Earbuds and Air Fryer can enhance revenue growth.</a:t>
+                <a:latin typeface="Calibri"/>
+              </a:rPr>
+              <a:t>Focusing on high-performing products like Wireless Earbuds and Air Fryer can enhance growth.</a:t>
             </a:r>
           </a:p>
           <a:p>
@@ -5111,9 +5111,9 @@
                 <a:solidFill>
                   <a:srgbClr val="3C4450"/>
                 </a:solidFill>
-                <a:latin typeface="Arial"/>
-              </a:rPr>
-              <a:t>•  Wireless Earbuds dominate with $163k, 16.4% of total revenue.</a:t>
+                <a:latin typeface="Calibri"/>
+              </a:rPr>
+              <a:t>•  Wireless Earbuds dominate with $163k in revenue.</a:t>
             </a:r>
           </a:p>
           <a:p>
@@ -5127,9 +5127,9 @@
                 <a:solidFill>
                   <a:srgbClr val="3C4450"/>
                 </a:solidFill>
-                <a:latin typeface="Arial"/>
-              </a:rPr>
-              <a:t>•  Air Fryer shows significant growth, up $15k from the previous month.</a:t>
+                <a:latin typeface="Calibri"/>
+              </a:rPr>
+              <a:t>•  Air Fryer shows the largest increase of +$15k.</a:t>
             </a:r>
           </a:p>
           <a:p>
@@ -5143,9 +5143,9 @@
                 <a:solidFill>
                   <a:srgbClr val="3C4450"/>
                 </a:solidFill>
-                <a:latin typeface="Arial"/>
-              </a:rPr>
-              <a:t>•  Overall product concentration remains balanced with diverse offerings. </a:t>
+                <a:latin typeface="Calibri"/>
+              </a:rPr>
+              <a:t>•  Cookware Set maintains strong performance at $106k.</a:t>
             </a:r>
           </a:p>
         </p:txBody>
@@ -5195,7 +5195,7 @@
                 <a:solidFill>
                   <a:srgbClr val="2E6DB4"/>
                 </a:solidFill>
-                <a:latin typeface="Arial"/>
+                <a:latin typeface="Calibri"/>
               </a:rPr>
               <a:t>RECOMMENDATIONS</a:t>
             </a:r>
@@ -5227,7 +5227,7 @@
             <a:r>
               <a:rPr sz="3000" b="1">
                 <a:solidFill>
-                  <a:srgbClr val="1F2A44"/>
+                  <a:srgbClr val="11243F"/>
                 </a:solidFill>
                 <a:latin typeface="Georgia"/>
               </a:rPr>
@@ -5263,7 +5263,7 @@
                 <a:solidFill>
                   <a:srgbClr val="7A828C"/>
                 </a:solidFill>
-                <a:latin typeface="Arial"/>
+                <a:latin typeface="Calibri"/>
               </a:rPr>
               <a:t>Source: figures verified against the source data.</a:t>
             </a:r>
@@ -5302,9 +5302,9 @@
                 <a:solidFill>
                   <a:srgbClr val="3C4450"/>
                 </a:solidFill>
-                <a:latin typeface="Arial"/>
-              </a:rPr>
-              <a:t>1.   Increase marketing investment in the Online channel to capitalize on $537k sales dominance.</a:t>
+                <a:latin typeface="Calibri"/>
+              </a:rPr>
+              <a:t>1.   Increase marketing investments in the Online channel to capitalize on $537k in sales.</a:t>
             </a:r>
           </a:p>
           <a:p>
@@ -5318,9 +5318,9 @@
                 <a:solidFill>
                   <a:srgbClr val="3C4450"/>
                 </a:solidFill>
-                <a:latin typeface="Arial"/>
-              </a:rPr>
-              <a:t>2.   Enhance product offerings in Electronics to drive growth beyond $293k.</a:t>
+                <a:latin typeface="Calibri"/>
+              </a:rPr>
+              <a:t>2.   Enhance product offerings in the Electronics category, which generated $293k, to drive growth.</a:t>
             </a:r>
           </a:p>
           <a:p>
@@ -5334,9 +5334,9 @@
                 <a:solidFill>
                   <a:srgbClr val="3C4450"/>
                 </a:solidFill>
-                <a:latin typeface="Arial"/>
-              </a:rPr>
-              <a:t>3.   Address the Coffee Grinder's decline by evaluating pricing and promotional strategies to recover the -$2k loss.</a:t>
+                <a:latin typeface="Calibri"/>
+              </a:rPr>
+              <a:t>3.   Address the decline of the Coffee Grinder product by evaluating pricing and promotional strategies.</a:t>
             </a:r>
           </a:p>
           <a:p>
@@ -5350,9 +5350,9 @@
                 <a:solidFill>
                   <a:srgbClr val="3C4450"/>
                 </a:solidFill>
-                <a:latin typeface="Arial"/>
-              </a:rPr>
-              <a:t>4.   Leverage North America's top performance by expanding regional sales initiatives to boost the $262k revenue.</a:t>
+                <a:latin typeface="Calibri"/>
+              </a:rPr>
+              <a:t>4.   Focus on expanding the North America region, contributing $262k, to maximize regional performance.</a:t>
             </a:r>
           </a:p>
         </p:txBody>

--- a/app/examples/retail_sales/report.pptx
+++ b/app/examples/retail_sales/report.pptx
@@ -3097,14 +3097,58 @@
       <p:grpSpPr/>
       <p:sp>
         <p:nvSpPr>
-          <p:cNvPr id="2" name="TextBox 1"/>
+          <p:cNvPr id="2" name="Rectangle 1"/>
+          <p:cNvSpPr/>
+          <p:nvPr/>
+        </p:nvSpPr>
+        <p:spPr>
+          <a:xfrm>
+            <a:off x="0" y="0"/>
+            <a:ext cx="12191695" cy="6858000"/>
+          </a:xfrm>
+          <a:prstGeom prst="rect">
+            <a:avLst/>
+          </a:prstGeom>
+          <a:solidFill>
+            <a:srgbClr val="11243F"/>
+          </a:solidFill>
+          <a:ln>
+            <a:noFill/>
+          </a:ln>
+          <a:effectLst/>
+        </p:spPr>
+        <p:style>
+          <a:lnRef idx="1">
+            <a:schemeClr val="accent1"/>
+          </a:lnRef>
+          <a:fillRef idx="3">
+            <a:schemeClr val="accent1"/>
+          </a:fillRef>
+          <a:effectRef idx="2">
+            <a:schemeClr val="accent1"/>
+          </a:effectRef>
+          <a:fontRef idx="minor">
+            <a:schemeClr val="lt1"/>
+          </a:fontRef>
+        </p:style>
+        <p:txBody>
+          <a:bodyPr rtlCol="0" anchor="ctr"/>
+          <a:lstStyle/>
+          <a:p>
+            <a:pPr algn="ctr"/>
+          </a:p>
+        </p:txBody>
+      </p:sp>
+      <p:sp>
+        <p:nvSpPr>
+          <p:cNvPr id="3" name="TextBox 2"/>
           <p:cNvSpPr txBox="1"/>
           <p:nvPr/>
         </p:nvSpPr>
         <p:spPr>
           <a:xfrm>
-            <a:off x="640080" y="2057400"/>
-            <a:ext cx="10881360" cy="1554480"/>
+            <a:off x="777240" y="2148840"/>
+            <a:ext cx="10607040" cy="365760"/>
           </a:xfrm>
           <a:prstGeom prst="rect">
             <a:avLst/>
@@ -3118,27 +3162,71 @@
           <a:lstStyle/>
           <a:p>
             <a:r>
-              <a:rPr sz="4600" b="1">
-                <a:solidFill>
-                  <a:srgbClr val="11243F"/>
-                </a:solidFill>
-                <a:latin typeface="Georgia"/>
-              </a:rPr>
-              <a:t>Revenue Growth and Channel Insights</a:t>
-            </a:r>
-          </a:p>
-        </p:txBody>
-      </p:sp>
-      <p:sp>
-        <p:nvSpPr>
-          <p:cNvPr id="3" name="TextBox 2"/>
+              <a:rPr sz="1400" b="1">
+                <a:solidFill>
+                  <a:srgbClr val="2E6DB4"/>
+                </a:solidFill>
+                <a:latin typeface="Calibri"/>
+              </a:rPr>
+              <a:t>PERFORMANCE REVIEW  ·  2026-05</a:t>
+            </a:r>
+          </a:p>
+        </p:txBody>
+      </p:sp>
+      <p:sp>
+        <p:nvSpPr>
+          <p:cNvPr id="4" name="Rectangle 3"/>
+          <p:cNvSpPr/>
+          <p:nvPr/>
+        </p:nvSpPr>
+        <p:spPr>
+          <a:xfrm>
+            <a:off x="822960" y="2697480"/>
+            <a:ext cx="1554480" cy="76200"/>
+          </a:xfrm>
+          <a:prstGeom prst="rect">
+            <a:avLst/>
+          </a:prstGeom>
+          <a:solidFill>
+            <a:srgbClr val="2E6DB4"/>
+          </a:solidFill>
+          <a:ln>
+            <a:noFill/>
+          </a:ln>
+          <a:effectLst/>
+        </p:spPr>
+        <p:style>
+          <a:lnRef idx="1">
+            <a:schemeClr val="accent1"/>
+          </a:lnRef>
+          <a:fillRef idx="3">
+            <a:schemeClr val="accent1"/>
+          </a:fillRef>
+          <a:effectRef idx="2">
+            <a:schemeClr val="accent1"/>
+          </a:effectRef>
+          <a:fontRef idx="minor">
+            <a:schemeClr val="lt1"/>
+          </a:fontRef>
+        </p:style>
+        <p:txBody>
+          <a:bodyPr rtlCol="0" anchor="ctr"/>
+          <a:lstStyle/>
+          <a:p>
+            <a:pPr algn="ctr"/>
+          </a:p>
+        </p:txBody>
+      </p:sp>
+      <p:sp>
+        <p:nvSpPr>
+          <p:cNvPr id="5" name="TextBox 4"/>
           <p:cNvSpPr txBox="1"/>
           <p:nvPr/>
         </p:nvSpPr>
         <p:spPr>
           <a:xfrm>
-            <a:off x="640080" y="3703320"/>
-            <a:ext cx="10881360" cy="548640"/>
+            <a:off x="731520" y="2926080"/>
+            <a:ext cx="10698480" cy="1828800"/>
           </a:xfrm>
           <a:prstGeom prst="rect">
             <a:avLst/>
@@ -3152,27 +3240,27 @@
           <a:lstStyle/>
           <a:p>
             <a:r>
-              <a:rPr sz="1700" b="0">
-                <a:solidFill>
-                  <a:srgbClr val="7A828C"/>
-                </a:solidFill>
-                <a:latin typeface="Calibri"/>
-              </a:rPr>
-              <a:t>Period 2026-05  |  source table: ex_retail_sales</a:t>
-            </a:r>
-          </a:p>
-        </p:txBody>
-      </p:sp>
-      <p:sp>
-        <p:nvSpPr>
-          <p:cNvPr id="4" name="TextBox 3"/>
+              <a:rPr sz="4600" b="1">
+                <a:solidFill>
+                  <a:srgbClr val="FFFFFF"/>
+                </a:solidFill>
+                <a:latin typeface="Georgia"/>
+              </a:rPr>
+              <a:t>Revenue Growth and Channel Insights</a:t>
+            </a:r>
+          </a:p>
+        </p:txBody>
+      </p:sp>
+      <p:sp>
+        <p:nvSpPr>
+          <p:cNvPr id="6" name="TextBox 5"/>
           <p:cNvSpPr txBox="1"/>
           <p:nvPr/>
         </p:nvSpPr>
         <p:spPr>
           <a:xfrm>
-            <a:off x="640080" y="4206240"/>
-            <a:ext cx="10881360" cy="457200"/>
+            <a:off x="777240" y="5029200"/>
+            <a:ext cx="10698480" cy="548640"/>
           </a:xfrm>
           <a:prstGeom prst="rect">
             <a:avLst/>
@@ -3186,13 +3274,13 @@
           <a:lstStyle/>
           <a:p>
             <a:r>
-              <a:rPr sz="1100" b="0">
-                <a:solidFill>
-                  <a:srgbClr val="7A828C"/>
+              <a:rPr sz="1700" b="0">
+                <a:solidFill>
+                  <a:srgbClr val="C0C5C9"/>
                 </a:solidFill>
                 <a:latin typeface="Calibri"/>
               </a:rPr>
-              <a:t>Generated 2026-06-10 17:36 UTC   |   CONFIDENTIAL</a:t>
+              <a:t>Retail / Commerce dataset  ·  104,567 rows</a:t>
             </a:r>
           </a:p>
         </p:txBody>
@@ -3934,8 +4022,8 @@
         </p:blipFill>
         <p:spPr>
           <a:xfrm>
-            <a:off x="457200" y="1783080"/>
-            <a:ext cx="6949440" cy="3563815"/>
+            <a:off x="3264408" y="1645920"/>
+            <a:ext cx="5669280" cy="2907323"/>
           </a:xfrm>
           <a:prstGeom prst="rect">
             <a:avLst/>
@@ -3950,8 +4038,8 @@
         </p:nvSpPr>
         <p:spPr>
           <a:xfrm>
-            <a:off x="457200" y="5486400"/>
-            <a:ext cx="6949440" cy="868680"/>
+            <a:off x="457200" y="4572000"/>
+            <a:ext cx="11277295" cy="411480"/>
           </a:xfrm>
           <a:prstGeom prst="rect">
             <a:avLst/>
@@ -3964,14 +4052,15 @@
           </a:bodyPr>
           <a:lstStyle/>
           <a:p>
-            <a:r>
-              <a:rPr sz="1100" b="0">
-                <a:solidFill>
-                  <a:srgbClr val="7A828C"/>
+            <a:pPr algn="ctr"/>
+            <a:r>
+              <a:rPr sz="1300" b="1">
+                <a:solidFill>
+                  <a:srgbClr val="11243F"/>
                 </a:solidFill>
                 <a:latin typeface="Calibri"/>
               </a:rPr>
-              <a:t>In the revenue breakdown for 2026-05, North America stands out with total revenue of $262k, making it the leading region. EMEA follows with $219k, showing a significant increase of +$14k from the previous period. The concentration of revenue indicates a strong performance in North America, while EMEA's growth highlights its emerging strength.</a:t>
+              <a:t>Focusing on EMEA's growth could enhance overall revenue performance.</a:t>
             </a:r>
           </a:p>
         </p:txBody>
@@ -3984,14 +4073,14 @@
         </p:nvSpPr>
         <p:spPr>
           <a:xfrm>
-            <a:off x="7772400" y="1783080"/>
-            <a:ext cx="3931920" cy="457200"/>
+            <a:off x="457200" y="5074920"/>
+            <a:ext cx="3454298" cy="50800"/>
           </a:xfrm>
           <a:prstGeom prst="rect">
             <a:avLst/>
           </a:prstGeom>
           <a:solidFill>
-            <a:srgbClr val="11243F"/>
+            <a:srgbClr val="2E6DB4"/>
           </a:solidFill>
           <a:ln>
             <a:noFill/>
@@ -4013,43 +4102,100 @@
           </a:fontRef>
         </p:style>
         <p:txBody>
-          <a:bodyPr rtlCol="0" anchor="ctr" lIns="201168" tIns="18288" bIns="18288"/>
+          <a:bodyPr rtlCol="0" anchor="ctr"/>
           <a:lstStyle/>
           <a:p>
             <a:pPr algn="ctr"/>
-            <a:r>
-              <a:rPr sz="1200" b="1">
-                <a:solidFill>
-                  <a:srgbClr val="FFFFFF"/>
+          </a:p>
+        </p:txBody>
+      </p:sp>
+      <p:sp>
+        <p:nvSpPr>
+          <p:cNvPr id="8" name="TextBox 7"/>
+          <p:cNvSpPr txBox="1"/>
+          <p:nvPr/>
+        </p:nvSpPr>
+        <p:spPr>
+          <a:xfrm>
+            <a:off x="457200" y="5184648"/>
+            <a:ext cx="3454298" cy="777240"/>
+          </a:xfrm>
+          <a:prstGeom prst="rect">
+            <a:avLst/>
+          </a:prstGeom>
+          <a:noFill/>
+        </p:spPr>
+        <p:txBody>
+          <a:bodyPr wrap="square">
+            <a:spAutoFit/>
+          </a:bodyPr>
+          <a:lstStyle/>
+          <a:p>
+            <a:r>
+              <a:rPr sz="3000" b="1">
+                <a:solidFill>
+                  <a:srgbClr val="11243F"/>
+                </a:solidFill>
+                <a:latin typeface="Georgia"/>
+              </a:rPr>
+              <a:t>$262k</a:t>
+            </a:r>
+          </a:p>
+        </p:txBody>
+      </p:sp>
+      <p:sp>
+        <p:nvSpPr>
+          <p:cNvPr id="9" name="TextBox 8"/>
+          <p:cNvSpPr txBox="1"/>
+          <p:nvPr/>
+        </p:nvSpPr>
+        <p:spPr>
+          <a:xfrm>
+            <a:off x="457200" y="5943600"/>
+            <a:ext cx="3454298" cy="502920"/>
+          </a:xfrm>
+          <a:prstGeom prst="rect">
+            <a:avLst/>
+          </a:prstGeom>
+          <a:noFill/>
+        </p:spPr>
+        <p:txBody>
+          <a:bodyPr wrap="square">
+            <a:spAutoFit/>
+          </a:bodyPr>
+          <a:lstStyle/>
+          <a:p>
+            <a:r>
+              <a:rPr sz="1200" b="0">
+                <a:solidFill>
+                  <a:srgbClr val="7A828C"/>
                 </a:solidFill>
                 <a:latin typeface="Calibri"/>
               </a:rPr>
-              <a:t>KEY TAKEAWAY</a:t>
-            </a:r>
-          </a:p>
-        </p:txBody>
-      </p:sp>
-      <p:sp>
-        <p:nvSpPr>
-          <p:cNvPr id="8" name="Rectangle 7"/>
+              <a:t>North America</a:t>
+            </a:r>
+          </a:p>
+        </p:txBody>
+      </p:sp>
+      <p:sp>
+        <p:nvSpPr>
+          <p:cNvPr id="10" name="Rectangle 9"/>
           <p:cNvSpPr/>
           <p:nvPr/>
         </p:nvSpPr>
         <p:spPr>
           <a:xfrm>
-            <a:off x="7772400" y="2240280"/>
-            <a:ext cx="3931920" cy="3200400"/>
+            <a:off x="4368698" y="5074920"/>
+            <a:ext cx="3454298" cy="50800"/>
           </a:xfrm>
           <a:prstGeom prst="rect">
             <a:avLst/>
           </a:prstGeom>
           <a:solidFill>
-            <a:srgbClr val="E6E8EB"/>
+            <a:srgbClr val="2E6DB4"/>
           </a:solidFill>
-          <a:ln w="9525">
-            <a:solidFill>
-              <a:srgbClr val="C0C5C9"/>
-            </a:solidFill>
+          <a:ln>
+            <a:noFill/>
           </a:ln>
           <a:effectLst/>
         </p:spPr>
@@ -4068,70 +4214,189 @@
           </a:fontRef>
         </p:style>
         <p:txBody>
-          <a:bodyPr rtlCol="0" anchor="t" wrap="square" lIns="219456" rIns="219456" tIns="237744"/>
-          <a:lstStyle/>
-          <a:p>
-            <a:pPr algn="l">
-              <a:spcAft>
-                <a:spcPts val="1600"/>
-              </a:spcAft>
-            </a:pPr>
-            <a:r>
-              <a:rPr sz="1300" b="0">
-                <a:solidFill>
-                  <a:srgbClr val="3C4450"/>
+          <a:bodyPr rtlCol="0" anchor="ctr"/>
+          <a:lstStyle/>
+          <a:p>
+            <a:pPr algn="ctr"/>
+          </a:p>
+        </p:txBody>
+      </p:sp>
+      <p:sp>
+        <p:nvSpPr>
+          <p:cNvPr id="11" name="TextBox 10"/>
+          <p:cNvSpPr txBox="1"/>
+          <p:nvPr/>
+        </p:nvSpPr>
+        <p:spPr>
+          <a:xfrm>
+            <a:off x="4368698" y="5184648"/>
+            <a:ext cx="3454298" cy="777240"/>
+          </a:xfrm>
+          <a:prstGeom prst="rect">
+            <a:avLst/>
+          </a:prstGeom>
+          <a:noFill/>
+        </p:spPr>
+        <p:txBody>
+          <a:bodyPr wrap="square">
+            <a:spAutoFit/>
+          </a:bodyPr>
+          <a:lstStyle/>
+          <a:p>
+            <a:r>
+              <a:rPr sz="3000" b="1">
+                <a:solidFill>
+                  <a:srgbClr val="11243F"/>
+                </a:solidFill>
+                <a:latin typeface="Georgia"/>
+              </a:rPr>
+              <a:t>$219k</a:t>
+            </a:r>
+          </a:p>
+        </p:txBody>
+      </p:sp>
+      <p:sp>
+        <p:nvSpPr>
+          <p:cNvPr id="12" name="TextBox 11"/>
+          <p:cNvSpPr txBox="1"/>
+          <p:nvPr/>
+        </p:nvSpPr>
+        <p:spPr>
+          <a:xfrm>
+            <a:off x="4368698" y="5943600"/>
+            <a:ext cx="3454298" cy="502920"/>
+          </a:xfrm>
+          <a:prstGeom prst="rect">
+            <a:avLst/>
+          </a:prstGeom>
+          <a:noFill/>
+        </p:spPr>
+        <p:txBody>
+          <a:bodyPr wrap="square">
+            <a:spAutoFit/>
+          </a:bodyPr>
+          <a:lstStyle/>
+          <a:p>
+            <a:r>
+              <a:rPr sz="1200" b="0">
+                <a:solidFill>
+                  <a:srgbClr val="7A828C"/>
                 </a:solidFill>
                 <a:latin typeface="Calibri"/>
               </a:rPr>
-              <a:t>Focusing on EMEA's growth could enhance overall revenue performance.</a:t>
-            </a:r>
-          </a:p>
-          <a:p>
-            <a:pPr algn="l">
-              <a:spcAft>
-                <a:spcPts val="700"/>
-              </a:spcAft>
-            </a:pPr>
-            <a:r>
-              <a:rPr sz="1100" b="0">
-                <a:solidFill>
-                  <a:srgbClr val="3C4450"/>
+              <a:t>EMEA</a:t>
+            </a:r>
+          </a:p>
+        </p:txBody>
+      </p:sp>
+      <p:sp>
+        <p:nvSpPr>
+          <p:cNvPr id="13" name="Rectangle 12"/>
+          <p:cNvSpPr/>
+          <p:nvPr/>
+        </p:nvSpPr>
+        <p:spPr>
+          <a:xfrm>
+            <a:off x="8280196" y="5074920"/>
+            <a:ext cx="3454298" cy="50800"/>
+          </a:xfrm>
+          <a:prstGeom prst="rect">
+            <a:avLst/>
+          </a:prstGeom>
+          <a:solidFill>
+            <a:srgbClr val="2E6DB4"/>
+          </a:solidFill>
+          <a:ln>
+            <a:noFill/>
+          </a:ln>
+          <a:effectLst/>
+        </p:spPr>
+        <p:style>
+          <a:lnRef idx="1">
+            <a:schemeClr val="accent1"/>
+          </a:lnRef>
+          <a:fillRef idx="3">
+            <a:schemeClr val="accent1"/>
+          </a:fillRef>
+          <a:effectRef idx="2">
+            <a:schemeClr val="accent1"/>
+          </a:effectRef>
+          <a:fontRef idx="minor">
+            <a:schemeClr val="lt1"/>
+          </a:fontRef>
+        </p:style>
+        <p:txBody>
+          <a:bodyPr rtlCol="0" anchor="ctr"/>
+          <a:lstStyle/>
+          <a:p>
+            <a:pPr algn="ctr"/>
+          </a:p>
+        </p:txBody>
+      </p:sp>
+      <p:sp>
+        <p:nvSpPr>
+          <p:cNvPr id="14" name="TextBox 13"/>
+          <p:cNvSpPr txBox="1"/>
+          <p:nvPr/>
+        </p:nvSpPr>
+        <p:spPr>
+          <a:xfrm>
+            <a:off x="8280196" y="5184648"/>
+            <a:ext cx="3454298" cy="777240"/>
+          </a:xfrm>
+          <a:prstGeom prst="rect">
+            <a:avLst/>
+          </a:prstGeom>
+          <a:noFill/>
+        </p:spPr>
+        <p:txBody>
+          <a:bodyPr wrap="square">
+            <a:spAutoFit/>
+          </a:bodyPr>
+          <a:lstStyle/>
+          <a:p>
+            <a:r>
+              <a:rPr sz="3000" b="1">
+                <a:solidFill>
+                  <a:srgbClr val="11243F"/>
+                </a:solidFill>
+                <a:latin typeface="Georgia"/>
+              </a:rPr>
+              <a:t>$202k</a:t>
+            </a:r>
+          </a:p>
+        </p:txBody>
+      </p:sp>
+      <p:sp>
+        <p:nvSpPr>
+          <p:cNvPr id="15" name="TextBox 14"/>
+          <p:cNvSpPr txBox="1"/>
+          <p:nvPr/>
+        </p:nvSpPr>
+        <p:spPr>
+          <a:xfrm>
+            <a:off x="8280196" y="5943600"/>
+            <a:ext cx="3454298" cy="502920"/>
+          </a:xfrm>
+          <a:prstGeom prst="rect">
+            <a:avLst/>
+          </a:prstGeom>
+          <a:noFill/>
+        </p:spPr>
+        <p:txBody>
+          <a:bodyPr wrap="square">
+            <a:spAutoFit/>
+          </a:bodyPr>
+          <a:lstStyle/>
+          <a:p>
+            <a:r>
+              <a:rPr sz="1200" b="0">
+                <a:solidFill>
+                  <a:srgbClr val="7A828C"/>
                 </a:solidFill>
                 <a:latin typeface="Calibri"/>
               </a:rPr>
-              <a:t>•  North America: $262k, 26.2% of total revenue</a:t>
-            </a:r>
-          </a:p>
-          <a:p>
-            <a:pPr algn="l">
-              <a:spcAft>
-                <a:spcPts val="700"/>
-              </a:spcAft>
-            </a:pPr>
-            <a:r>
-              <a:rPr sz="1100" b="0">
-                <a:solidFill>
-                  <a:srgbClr val="3C4450"/>
-                </a:solidFill>
-                <a:latin typeface="Calibri"/>
-              </a:rPr>
-              <a:t>•  EMEA: $219k, largest growth at +$14k</a:t>
-            </a:r>
-          </a:p>
-          <a:p>
-            <a:pPr algn="l">
-              <a:spcAft>
-                <a:spcPts val="700"/>
-              </a:spcAft>
-            </a:pPr>
-            <a:r>
-              <a:rPr sz="1100" b="0">
-                <a:solidFill>
-                  <a:srgbClr val="3C4450"/>
-                </a:solidFill>
-                <a:latin typeface="Calibri"/>
-              </a:rPr>
-              <a:t>•  UK &amp; Ireland: $200k, also shows strong growth of +$13k</a:t>
+              <a:t>APAC</a:t>
             </a:r>
           </a:p>
         </p:txBody>
@@ -4610,8 +4875,8 @@
         </p:blipFill>
         <p:spPr>
           <a:xfrm>
-            <a:off x="457200" y="1783080"/>
-            <a:ext cx="6949440" cy="3563815"/>
+            <a:off x="3264408" y="1645920"/>
+            <a:ext cx="5669280" cy="2907323"/>
           </a:xfrm>
           <a:prstGeom prst="rect">
             <a:avLst/>
@@ -4626,8 +4891,8 @@
         </p:nvSpPr>
         <p:spPr>
           <a:xfrm>
-            <a:off x="457200" y="5486400"/>
-            <a:ext cx="6949440" cy="868680"/>
+            <a:off x="457200" y="4572000"/>
+            <a:ext cx="11277295" cy="411480"/>
           </a:xfrm>
           <a:prstGeom prst="rect">
             <a:avLst/>
@@ -4640,14 +4905,15 @@
           </a:bodyPr>
           <a:lstStyle/>
           <a:p>
-            <a:r>
-              <a:rPr sz="1100" b="0">
-                <a:solidFill>
-                  <a:srgbClr val="7A828C"/>
+            <a:pPr algn="ctr"/>
+            <a:r>
+              <a:rPr sz="1300" b="1">
+                <a:solidFill>
+                  <a:srgbClr val="11243F"/>
                 </a:solidFill>
                 <a:latin typeface="Calibri"/>
               </a:rPr>
-              <a:t>In May 2026, Electronics dominates the revenue breakdown with $293k, accounting for 29.4% of total revenue. Home &amp; Kitchen follows closely with $279k, experiencing the largest increase of +$24k from the previous month. Beauty &amp; Wellness also shows a strong performance, growing by +$10k to reach $248k, indicating a healthy concentration in these top categories.</a:t>
+              <a:t>Focusing on Electronics and Home &amp; Kitchen can drive future growth.</a:t>
             </a:r>
           </a:p>
         </p:txBody>
@@ -4660,14 +4926,14 @@
         </p:nvSpPr>
         <p:spPr>
           <a:xfrm>
-            <a:off x="7772400" y="1783080"/>
-            <a:ext cx="3931920" cy="457200"/>
+            <a:off x="457200" y="5074920"/>
+            <a:ext cx="3454298" cy="50800"/>
           </a:xfrm>
           <a:prstGeom prst="rect">
             <a:avLst/>
           </a:prstGeom>
           <a:solidFill>
-            <a:srgbClr val="11243F"/>
+            <a:srgbClr val="2E6DB4"/>
           </a:solidFill>
           <a:ln>
             <a:noFill/>
@@ -4689,43 +4955,100 @@
           </a:fontRef>
         </p:style>
         <p:txBody>
-          <a:bodyPr rtlCol="0" anchor="ctr" lIns="201168" tIns="18288" bIns="18288"/>
+          <a:bodyPr rtlCol="0" anchor="ctr"/>
           <a:lstStyle/>
           <a:p>
             <a:pPr algn="ctr"/>
-            <a:r>
-              <a:rPr sz="1200" b="1">
-                <a:solidFill>
-                  <a:srgbClr val="FFFFFF"/>
+          </a:p>
+        </p:txBody>
+      </p:sp>
+      <p:sp>
+        <p:nvSpPr>
+          <p:cNvPr id="8" name="TextBox 7"/>
+          <p:cNvSpPr txBox="1"/>
+          <p:nvPr/>
+        </p:nvSpPr>
+        <p:spPr>
+          <a:xfrm>
+            <a:off x="457200" y="5184648"/>
+            <a:ext cx="3454298" cy="777240"/>
+          </a:xfrm>
+          <a:prstGeom prst="rect">
+            <a:avLst/>
+          </a:prstGeom>
+          <a:noFill/>
+        </p:spPr>
+        <p:txBody>
+          <a:bodyPr wrap="square">
+            <a:spAutoFit/>
+          </a:bodyPr>
+          <a:lstStyle/>
+          <a:p>
+            <a:r>
+              <a:rPr sz="3000" b="1">
+                <a:solidFill>
+                  <a:srgbClr val="11243F"/>
+                </a:solidFill>
+                <a:latin typeface="Georgia"/>
+              </a:rPr>
+              <a:t>$293k</a:t>
+            </a:r>
+          </a:p>
+        </p:txBody>
+      </p:sp>
+      <p:sp>
+        <p:nvSpPr>
+          <p:cNvPr id="9" name="TextBox 8"/>
+          <p:cNvSpPr txBox="1"/>
+          <p:nvPr/>
+        </p:nvSpPr>
+        <p:spPr>
+          <a:xfrm>
+            <a:off x="457200" y="5943600"/>
+            <a:ext cx="3454298" cy="502920"/>
+          </a:xfrm>
+          <a:prstGeom prst="rect">
+            <a:avLst/>
+          </a:prstGeom>
+          <a:noFill/>
+        </p:spPr>
+        <p:txBody>
+          <a:bodyPr wrap="square">
+            <a:spAutoFit/>
+          </a:bodyPr>
+          <a:lstStyle/>
+          <a:p>
+            <a:r>
+              <a:rPr sz="1200" b="0">
+                <a:solidFill>
+                  <a:srgbClr val="7A828C"/>
                 </a:solidFill>
                 <a:latin typeface="Calibri"/>
               </a:rPr>
-              <a:t>KEY TAKEAWAY</a:t>
-            </a:r>
-          </a:p>
-        </p:txBody>
-      </p:sp>
-      <p:sp>
-        <p:nvSpPr>
-          <p:cNvPr id="8" name="Rectangle 7"/>
+              <a:t>Electronics</a:t>
+            </a:r>
+          </a:p>
+        </p:txBody>
+      </p:sp>
+      <p:sp>
+        <p:nvSpPr>
+          <p:cNvPr id="10" name="Rectangle 9"/>
           <p:cNvSpPr/>
           <p:nvPr/>
         </p:nvSpPr>
         <p:spPr>
           <a:xfrm>
-            <a:off x="7772400" y="2240280"/>
-            <a:ext cx="3931920" cy="3200400"/>
+            <a:off x="4368698" y="5074920"/>
+            <a:ext cx="3454298" cy="50800"/>
           </a:xfrm>
           <a:prstGeom prst="rect">
             <a:avLst/>
           </a:prstGeom>
           <a:solidFill>
-            <a:srgbClr val="E6E8EB"/>
+            <a:srgbClr val="2E6DB4"/>
           </a:solidFill>
-          <a:ln w="9525">
-            <a:solidFill>
-              <a:srgbClr val="C0C5C9"/>
-            </a:solidFill>
+          <a:ln>
+            <a:noFill/>
           </a:ln>
           <a:effectLst/>
         </p:spPr>
@@ -4744,70 +5067,189 @@
           </a:fontRef>
         </p:style>
         <p:txBody>
-          <a:bodyPr rtlCol="0" anchor="t" wrap="square" lIns="219456" rIns="219456" tIns="237744"/>
-          <a:lstStyle/>
-          <a:p>
-            <a:pPr algn="l">
-              <a:spcAft>
-                <a:spcPts val="1600"/>
-              </a:spcAft>
-            </a:pPr>
-            <a:r>
-              <a:rPr sz="1300" b="0">
-                <a:solidFill>
-                  <a:srgbClr val="3C4450"/>
+          <a:bodyPr rtlCol="0" anchor="ctr"/>
+          <a:lstStyle/>
+          <a:p>
+            <a:pPr algn="ctr"/>
+          </a:p>
+        </p:txBody>
+      </p:sp>
+      <p:sp>
+        <p:nvSpPr>
+          <p:cNvPr id="11" name="TextBox 10"/>
+          <p:cNvSpPr txBox="1"/>
+          <p:nvPr/>
+        </p:nvSpPr>
+        <p:spPr>
+          <a:xfrm>
+            <a:off x="4368698" y="5184648"/>
+            <a:ext cx="3454298" cy="777240"/>
+          </a:xfrm>
+          <a:prstGeom prst="rect">
+            <a:avLst/>
+          </a:prstGeom>
+          <a:noFill/>
+        </p:spPr>
+        <p:txBody>
+          <a:bodyPr wrap="square">
+            <a:spAutoFit/>
+          </a:bodyPr>
+          <a:lstStyle/>
+          <a:p>
+            <a:r>
+              <a:rPr sz="3000" b="1">
+                <a:solidFill>
+                  <a:srgbClr val="11243F"/>
+                </a:solidFill>
+                <a:latin typeface="Georgia"/>
+              </a:rPr>
+              <a:t>$279k</a:t>
+            </a:r>
+          </a:p>
+        </p:txBody>
+      </p:sp>
+      <p:sp>
+        <p:nvSpPr>
+          <p:cNvPr id="12" name="TextBox 11"/>
+          <p:cNvSpPr txBox="1"/>
+          <p:nvPr/>
+        </p:nvSpPr>
+        <p:spPr>
+          <a:xfrm>
+            <a:off x="4368698" y="5943600"/>
+            <a:ext cx="3454298" cy="502920"/>
+          </a:xfrm>
+          <a:prstGeom prst="rect">
+            <a:avLst/>
+          </a:prstGeom>
+          <a:noFill/>
+        </p:spPr>
+        <p:txBody>
+          <a:bodyPr wrap="square">
+            <a:spAutoFit/>
+          </a:bodyPr>
+          <a:lstStyle/>
+          <a:p>
+            <a:r>
+              <a:rPr sz="1200" b="0">
+                <a:solidFill>
+                  <a:srgbClr val="7A828C"/>
                 </a:solidFill>
                 <a:latin typeface="Calibri"/>
               </a:rPr>
-              <a:t>Focusing on Electronics and Home &amp; Kitchen can drive future growth.</a:t>
-            </a:r>
-          </a:p>
-          <a:p>
-            <a:pPr algn="l">
-              <a:spcAft>
-                <a:spcPts val="700"/>
-              </a:spcAft>
-            </a:pPr>
-            <a:r>
-              <a:rPr sz="1100" b="0">
-                <a:solidFill>
-                  <a:srgbClr val="3C4450"/>
+              <a:t>Home &amp; Kitchen</a:t>
+            </a:r>
+          </a:p>
+        </p:txBody>
+      </p:sp>
+      <p:sp>
+        <p:nvSpPr>
+          <p:cNvPr id="13" name="Rectangle 12"/>
+          <p:cNvSpPr/>
+          <p:nvPr/>
+        </p:nvSpPr>
+        <p:spPr>
+          <a:xfrm>
+            <a:off x="8280196" y="5074920"/>
+            <a:ext cx="3454298" cy="50800"/>
+          </a:xfrm>
+          <a:prstGeom prst="rect">
+            <a:avLst/>
+          </a:prstGeom>
+          <a:solidFill>
+            <a:srgbClr val="2E6DB4"/>
+          </a:solidFill>
+          <a:ln>
+            <a:noFill/>
+          </a:ln>
+          <a:effectLst/>
+        </p:spPr>
+        <p:style>
+          <a:lnRef idx="1">
+            <a:schemeClr val="accent1"/>
+          </a:lnRef>
+          <a:fillRef idx="3">
+            <a:schemeClr val="accent1"/>
+          </a:fillRef>
+          <a:effectRef idx="2">
+            <a:schemeClr val="accent1"/>
+          </a:effectRef>
+          <a:fontRef idx="minor">
+            <a:schemeClr val="lt1"/>
+          </a:fontRef>
+        </p:style>
+        <p:txBody>
+          <a:bodyPr rtlCol="0" anchor="ctr"/>
+          <a:lstStyle/>
+          <a:p>
+            <a:pPr algn="ctr"/>
+          </a:p>
+        </p:txBody>
+      </p:sp>
+      <p:sp>
+        <p:nvSpPr>
+          <p:cNvPr id="14" name="TextBox 13"/>
+          <p:cNvSpPr txBox="1"/>
+          <p:nvPr/>
+        </p:nvSpPr>
+        <p:spPr>
+          <a:xfrm>
+            <a:off x="8280196" y="5184648"/>
+            <a:ext cx="3454298" cy="777240"/>
+          </a:xfrm>
+          <a:prstGeom prst="rect">
+            <a:avLst/>
+          </a:prstGeom>
+          <a:noFill/>
+        </p:spPr>
+        <p:txBody>
+          <a:bodyPr wrap="square">
+            <a:spAutoFit/>
+          </a:bodyPr>
+          <a:lstStyle/>
+          <a:p>
+            <a:r>
+              <a:rPr sz="3000" b="1">
+                <a:solidFill>
+                  <a:srgbClr val="11243F"/>
+                </a:solidFill>
+                <a:latin typeface="Georgia"/>
+              </a:rPr>
+              <a:t>$248k</a:t>
+            </a:r>
+          </a:p>
+        </p:txBody>
+      </p:sp>
+      <p:sp>
+        <p:nvSpPr>
+          <p:cNvPr id="15" name="TextBox 14"/>
+          <p:cNvSpPr txBox="1"/>
+          <p:nvPr/>
+        </p:nvSpPr>
+        <p:spPr>
+          <a:xfrm>
+            <a:off x="8280196" y="5943600"/>
+            <a:ext cx="3454298" cy="502920"/>
+          </a:xfrm>
+          <a:prstGeom prst="rect">
+            <a:avLst/>
+          </a:prstGeom>
+          <a:noFill/>
+        </p:spPr>
+        <p:txBody>
+          <a:bodyPr wrap="square">
+            <a:spAutoFit/>
+          </a:bodyPr>
+          <a:lstStyle/>
+          <a:p>
+            <a:r>
+              <a:rPr sz="1200" b="0">
+                <a:solidFill>
+                  <a:srgbClr val="7A828C"/>
                 </a:solidFill>
                 <a:latin typeface="Calibri"/>
               </a:rPr>
-              <a:t>•  Electronics contributes $293k, leading all categories.</a:t>
-            </a:r>
-          </a:p>
-          <a:p>
-            <a:pPr algn="l">
-              <a:spcAft>
-                <a:spcPts val="700"/>
-              </a:spcAft>
-            </a:pPr>
-            <a:r>
-              <a:rPr sz="1100" b="0">
-                <a:solidFill>
-                  <a:srgbClr val="3C4450"/>
-                </a:solidFill>
-                <a:latin typeface="Calibri"/>
-              </a:rPr>
-              <a:t>•  Home &amp; Kitchen increases by +$24k, the largest mover.</a:t>
-            </a:r>
-          </a:p>
-          <a:p>
-            <a:pPr algn="l">
-              <a:spcAft>
-                <a:spcPts val="700"/>
-              </a:spcAft>
-            </a:pPr>
-            <a:r>
-              <a:rPr sz="1100" b="0">
-                <a:solidFill>
-                  <a:srgbClr val="3C4450"/>
-                </a:solidFill>
-                <a:latin typeface="Calibri"/>
-              </a:rPr>
-              <a:t>•  Beauty &amp; Wellness grows by +$10k, reflecting strong demand.</a:t>
+              <a:t>Beauty &amp; Wellness</a:t>
             </a:r>
           </a:p>
         </p:txBody>

--- a/app/examples/retail_sales/report.pptx
+++ b/app/examples/retail_sales/report.pptx
@@ -3147,8 +3147,8 @@
         </p:nvSpPr>
         <p:spPr>
           <a:xfrm>
-            <a:off x="777240" y="2148840"/>
-            <a:ext cx="10607040" cy="365760"/>
+            <a:off x="777240" y="777240"/>
+            <a:ext cx="10607040" cy="1828800"/>
           </a:xfrm>
           <a:prstGeom prst="rect">
             <a:avLst/>
@@ -3162,13 +3162,13 @@
           <a:lstStyle/>
           <a:p>
             <a:r>
-              <a:rPr sz="1400" b="1">
-                <a:solidFill>
-                  <a:srgbClr val="2E6DB4"/>
-                </a:solidFill>
-                <a:latin typeface="Calibri"/>
-              </a:rPr>
-              <a:t>PERFORMANCE REVIEW  ·  2026-05</a:t>
+              <a:rPr sz="4600" b="1">
+                <a:solidFill>
+                  <a:srgbClr val="FFFFFF"/>
+                </a:solidFill>
+                <a:latin typeface="Georgia"/>
+              </a:rPr>
+              <a:t>Revenue Growth and Channel Insights</a:t>
             </a:r>
           </a:p>
         </p:txBody>
@@ -3181,7 +3181,7 @@
         </p:nvSpPr>
         <p:spPr>
           <a:xfrm>
-            <a:off x="822960" y="2697480"/>
+            <a:off x="822960" y="2743200"/>
             <a:ext cx="1554480" cy="76200"/>
           </a:xfrm>
           <a:prstGeom prst="rect">
@@ -3225,42 +3225,8 @@
         </p:nvSpPr>
         <p:spPr>
           <a:xfrm>
-            <a:off x="731520" y="2926080"/>
-            <a:ext cx="10698480" cy="1828800"/>
-          </a:xfrm>
-          <a:prstGeom prst="rect">
-            <a:avLst/>
-          </a:prstGeom>
-          <a:noFill/>
-        </p:spPr>
-        <p:txBody>
-          <a:bodyPr wrap="square">
-            <a:spAutoFit/>
-          </a:bodyPr>
-          <a:lstStyle/>
-          <a:p>
-            <a:r>
-              <a:rPr sz="4600" b="1">
-                <a:solidFill>
-                  <a:srgbClr val="FFFFFF"/>
-                </a:solidFill>
-                <a:latin typeface="Georgia"/>
-              </a:rPr>
-              <a:t>Revenue Growth and Channel Insights</a:t>
-            </a:r>
-          </a:p>
-        </p:txBody>
-      </p:sp>
-      <p:sp>
-        <p:nvSpPr>
-          <p:cNvPr id="6" name="TextBox 5"/>
-          <p:cNvSpPr txBox="1"/>
-          <p:nvPr/>
-        </p:nvSpPr>
-        <p:spPr>
-          <a:xfrm>
-            <a:off x="777240" y="5029200"/>
-            <a:ext cx="10698480" cy="548640"/>
+            <a:off x="777240" y="2971800"/>
+            <a:ext cx="10607040" cy="548640"/>
           </a:xfrm>
           <a:prstGeom prst="rect">
             <a:avLst/>
@@ -3366,7 +3332,7 @@
                 </a:solidFill>
                 <a:latin typeface="Georgia"/>
               </a:rPr>
-              <a:t>Sustained revenue growth highlights key opportunities in online sales and electronics.</a:t>
+              <a:t>Total revenue growth indicates strong performance in key areas.</a:t>
             </a:r>
           </a:p>
         </p:txBody>
@@ -3447,7 +3413,7 @@
                 </a:solidFill>
                 <a:latin typeface="Calibri"/>
               </a:rPr>
-              <a:t>Total revenue reached $998k in 2026-05, reflecting a positive growth of +4.5%.</a:t>
+              <a:t>Total revenue reached $998k in 2026-05, up +4.5% from $955k.</a:t>
             </a:r>
           </a:p>
           <a:p>
@@ -3519,7 +3485,7 @@
                 </a:solidFill>
                 <a:latin typeface="Calibri"/>
               </a:rPr>
-              <a:t>Electronics category generated $293k, making up 29.4% of total revenue.</a:t>
+              <a:t>Electronics category sales were $293k, making up 29.4% of total revenue.</a:t>
             </a:r>
           </a:p>
           <a:p>
@@ -3543,7 +3509,31 @@
                 </a:solidFill>
                 <a:latin typeface="Calibri"/>
               </a:rPr>
-              <a:t>Coffee Grinder sales declined by -$2k compared to the prior month.</a:t>
+              <a:t>Wireless Earbuds sales totaled $163k, contributing 16.4% to total revenue.</a:t>
+            </a:r>
+          </a:p>
+          <a:p>
+            <a:pPr>
+              <a:spcAft>
+                <a:spcPts val="1600"/>
+              </a:spcAft>
+            </a:pPr>
+            <a:r>
+              <a:rPr sz="1600" b="1">
+                <a:solidFill>
+                  <a:srgbClr val="2E6DB4"/>
+                </a:solidFill>
+              </a:rPr>
+              <a:t>●  </a:t>
+            </a:r>
+            <a:r>
+              <a:rPr sz="1600" b="0">
+                <a:solidFill>
+                  <a:srgbClr val="3C4450"/>
+                </a:solidFill>
+                <a:latin typeface="Calibri"/>
+              </a:rPr>
+              <a:t>Coffee Grinder sales declined by -$2k compared to the previous month.</a:t>
             </a:r>
           </a:p>
         </p:txBody>
@@ -3629,7 +3619,7 @@
                 </a:solidFill>
                 <a:latin typeface="Georgia"/>
               </a:rPr>
-              <a:t>Total revenue increased to $998k in 2026-05, up $43k from April.</a:t>
+              <a:t>Total revenue increased to $998k in May, up $43k from April.</a:t>
             </a:r>
           </a:p>
         </p:txBody>
@@ -3721,7 +3711,7 @@
                 </a:solidFill>
                 <a:latin typeface="Calibri"/>
               </a:rPr>
-              <a:t>In May 2026, total revenue reached $998k, reflecting a 4.5% increase from April's $955k. This growth continues the upward trend observed in recent months, with May's performance nearing the peak month of $1.41M. The recent trend indicates a recovery from lower revenue months earlier in the year, particularly February's low of $753k.</a:t>
+              <a:t>In May 2026, total revenue reached $998k, reflecting a growth of $43k or +4.5% compared to April's $955k. This upward trend follows a recent pattern of fluctuating monthly revenues, with a notable peak of $1.41M in December 2025. The last twelve months show a seasonal peak in December, indicating potential for future growth during similar periods.</a:t>
             </a:r>
           </a:p>
         </p:txBody>
@@ -3833,7 +3823,7 @@
                 </a:solidFill>
                 <a:latin typeface="Calibri"/>
               </a:rPr>
-              <a:t>Sustained revenue growth signals positive momentum heading into the next quarter.</a:t>
+              <a:t>Sustained revenue growth in May suggests positive momentum heading into the next quarter.</a:t>
             </a:r>
           </a:p>
           <a:p>
@@ -3849,7 +3839,7 @@
                 </a:solidFill>
                 <a:latin typeface="Calibri"/>
               </a:rPr>
-              <a:t>•  Revenue growth of $43k from April to May</a:t>
+              <a:t>•  May's revenue growth continues the upward trend from April.</a:t>
             </a:r>
           </a:p>
           <a:p>
@@ -3865,7 +3855,7 @@
                 </a:solidFill>
                 <a:latin typeface="Calibri"/>
               </a:rPr>
-              <a:t>•  Recent trend shows recovery from February's low</a:t>
+              <a:t>•  December 2025 marked the peak month at $1.41M.</a:t>
             </a:r>
           </a:p>
           <a:p>
@@ -3881,7 +3871,7 @@
                 </a:solidFill>
                 <a:latin typeface="Calibri"/>
               </a:rPr>
-              <a:t>•  May revenue approaches peak of $1.41M</a:t>
+              <a:t>•  Recent months show variability, with significant fluctuations in revenue.</a:t>
             </a:r>
           </a:p>
         </p:txBody>
@@ -3967,7 +3957,7 @@
                 </a:solidFill>
                 <a:latin typeface="Georgia"/>
               </a:rPr>
-              <a:t>North America leads with $262k, while EMEA grows by +$14k.</a:t>
+              <a:t>North America leads with $262k, while EMEA grows by $14k.</a:t>
             </a:r>
           </a:p>
         </p:txBody>
@@ -4022,8 +4012,8 @@
         </p:blipFill>
         <p:spPr>
           <a:xfrm>
-            <a:off x="3264408" y="1645920"/>
-            <a:ext cx="5669280" cy="2907323"/>
+            <a:off x="914400" y="1554480"/>
+            <a:ext cx="10332720" cy="3061547"/>
           </a:xfrm>
           <a:prstGeom prst="rect">
             <a:avLst/>
@@ -4032,48 +4022,13 @@
       </p:pic>
       <p:sp>
         <p:nvSpPr>
-          <p:cNvPr id="6" name="TextBox 5"/>
-          <p:cNvSpPr txBox="1"/>
-          <p:nvPr/>
-        </p:nvSpPr>
-        <p:spPr>
-          <a:xfrm>
-            <a:off x="457200" y="4572000"/>
-            <a:ext cx="11277295" cy="411480"/>
-          </a:xfrm>
-          <a:prstGeom prst="rect">
-            <a:avLst/>
-          </a:prstGeom>
-          <a:noFill/>
-        </p:spPr>
-        <p:txBody>
-          <a:bodyPr wrap="square">
-            <a:spAutoFit/>
-          </a:bodyPr>
-          <a:lstStyle/>
-          <a:p>
-            <a:pPr algn="ctr"/>
-            <a:r>
-              <a:rPr sz="1300" b="1">
-                <a:solidFill>
-                  <a:srgbClr val="11243F"/>
-                </a:solidFill>
-                <a:latin typeface="Calibri"/>
-              </a:rPr>
-              <a:t>Focusing on EMEA's growth could enhance overall revenue performance.</a:t>
-            </a:r>
-          </a:p>
-        </p:txBody>
-      </p:sp>
-      <p:sp>
-        <p:nvSpPr>
-          <p:cNvPr id="7" name="Rectangle 6"/>
+          <p:cNvPr id="6" name="Rectangle 5"/>
           <p:cNvSpPr/>
           <p:nvPr/>
         </p:nvSpPr>
         <p:spPr>
           <a:xfrm>
-            <a:off x="457200" y="5074920"/>
+            <a:off x="457200" y="4754880"/>
             <a:ext cx="3454298" cy="50800"/>
           </a:xfrm>
           <a:prstGeom prst="rect">
@@ -4111,14 +4066,14 @@
       </p:sp>
       <p:sp>
         <p:nvSpPr>
-          <p:cNvPr id="8" name="TextBox 7"/>
+          <p:cNvPr id="7" name="TextBox 6"/>
           <p:cNvSpPr txBox="1"/>
           <p:nvPr/>
         </p:nvSpPr>
         <p:spPr>
           <a:xfrm>
-            <a:off x="457200" y="5184648"/>
-            <a:ext cx="3454298" cy="777240"/>
+            <a:off x="457200" y="4846320"/>
+            <a:ext cx="3454298" cy="640080"/>
           </a:xfrm>
           <a:prstGeom prst="rect">
             <a:avLst/>
@@ -4132,7 +4087,7 @@
           <a:lstStyle/>
           <a:p>
             <a:r>
-              <a:rPr sz="3000" b="1">
+              <a:rPr sz="2700" b="1">
                 <a:solidFill>
                   <a:srgbClr val="11243F"/>
                 </a:solidFill>
@@ -4145,14 +4100,14 @@
       </p:sp>
       <p:sp>
         <p:nvSpPr>
-          <p:cNvPr id="9" name="TextBox 8"/>
+          <p:cNvPr id="8" name="TextBox 7"/>
           <p:cNvSpPr txBox="1"/>
           <p:nvPr/>
         </p:nvSpPr>
         <p:spPr>
           <a:xfrm>
-            <a:off x="457200" y="5943600"/>
-            <a:ext cx="3454298" cy="502920"/>
+            <a:off x="457200" y="5468112"/>
+            <a:ext cx="3454298" cy="1417320"/>
           </a:xfrm>
           <a:prstGeom prst="rect">
             <a:avLst/>
@@ -4166,26 +4121,26 @@
           <a:lstStyle/>
           <a:p>
             <a:r>
-              <a:rPr sz="1200" b="0">
+              <a:rPr sz="1100" b="0">
                 <a:solidFill>
                   <a:srgbClr val="7A828C"/>
                 </a:solidFill>
                 <a:latin typeface="Calibri"/>
               </a:rPr>
-              <a:t>North America</a:t>
-            </a:r>
-          </a:p>
-        </p:txBody>
-      </p:sp>
-      <p:sp>
-        <p:nvSpPr>
-          <p:cNvPr id="10" name="Rectangle 9"/>
+              <a:t>North America contributes 26.2% of total revenue.</a:t>
+            </a:r>
+          </a:p>
+        </p:txBody>
+      </p:sp>
+      <p:sp>
+        <p:nvSpPr>
+          <p:cNvPr id="9" name="Rectangle 8"/>
           <p:cNvSpPr/>
           <p:nvPr/>
         </p:nvSpPr>
         <p:spPr>
           <a:xfrm>
-            <a:off x="4368698" y="5074920"/>
+            <a:off x="4368698" y="4754880"/>
             <a:ext cx="3454298" cy="50800"/>
           </a:xfrm>
           <a:prstGeom prst="rect">
@@ -4223,14 +4178,14 @@
       </p:sp>
       <p:sp>
         <p:nvSpPr>
-          <p:cNvPr id="11" name="TextBox 10"/>
+          <p:cNvPr id="10" name="TextBox 9"/>
           <p:cNvSpPr txBox="1"/>
           <p:nvPr/>
         </p:nvSpPr>
         <p:spPr>
           <a:xfrm>
-            <a:off x="4368698" y="5184648"/>
-            <a:ext cx="3454298" cy="777240"/>
+            <a:off x="4368698" y="4846320"/>
+            <a:ext cx="3454298" cy="640080"/>
           </a:xfrm>
           <a:prstGeom prst="rect">
             <a:avLst/>
@@ -4244,7 +4199,7 @@
           <a:lstStyle/>
           <a:p>
             <a:r>
-              <a:rPr sz="3000" b="1">
+              <a:rPr sz="2700" b="1">
                 <a:solidFill>
                   <a:srgbClr val="11243F"/>
                 </a:solidFill>
@@ -4257,14 +4212,14 @@
       </p:sp>
       <p:sp>
         <p:nvSpPr>
-          <p:cNvPr id="12" name="TextBox 11"/>
+          <p:cNvPr id="11" name="TextBox 10"/>
           <p:cNvSpPr txBox="1"/>
           <p:nvPr/>
         </p:nvSpPr>
         <p:spPr>
           <a:xfrm>
-            <a:off x="4368698" y="5943600"/>
-            <a:ext cx="3454298" cy="502920"/>
+            <a:off x="4368698" y="5468112"/>
+            <a:ext cx="3454298" cy="1417320"/>
           </a:xfrm>
           <a:prstGeom prst="rect">
             <a:avLst/>
@@ -4278,26 +4233,26 @@
           <a:lstStyle/>
           <a:p>
             <a:r>
-              <a:rPr sz="1200" b="0">
+              <a:rPr sz="1100" b="0">
                 <a:solidFill>
                   <a:srgbClr val="7A828C"/>
                 </a:solidFill>
                 <a:latin typeface="Calibri"/>
               </a:rPr>
-              <a:t>EMEA</a:t>
-            </a:r>
-          </a:p>
-        </p:txBody>
-      </p:sp>
-      <p:sp>
-        <p:nvSpPr>
-          <p:cNvPr id="13" name="Rectangle 12"/>
+              <a:t>EMEA's revenue increased by $14k, the largest growth.</a:t>
+            </a:r>
+          </a:p>
+        </p:txBody>
+      </p:sp>
+      <p:sp>
+        <p:nvSpPr>
+          <p:cNvPr id="12" name="Rectangle 11"/>
           <p:cNvSpPr/>
           <p:nvPr/>
         </p:nvSpPr>
         <p:spPr>
           <a:xfrm>
-            <a:off x="8280196" y="5074920"/>
+            <a:off x="8280196" y="4754880"/>
             <a:ext cx="3454298" cy="50800"/>
           </a:xfrm>
           <a:prstGeom prst="rect">
@@ -4335,14 +4290,14 @@
       </p:sp>
       <p:sp>
         <p:nvSpPr>
-          <p:cNvPr id="14" name="TextBox 13"/>
+          <p:cNvPr id="13" name="TextBox 12"/>
           <p:cNvSpPr txBox="1"/>
           <p:nvPr/>
         </p:nvSpPr>
         <p:spPr>
           <a:xfrm>
-            <a:off x="8280196" y="5184648"/>
-            <a:ext cx="3454298" cy="777240"/>
+            <a:off x="8280196" y="4846320"/>
+            <a:ext cx="3454298" cy="640080"/>
           </a:xfrm>
           <a:prstGeom prst="rect">
             <a:avLst/>
@@ -4356,7 +4311,7 @@
           <a:lstStyle/>
           <a:p>
             <a:r>
-              <a:rPr sz="3000" b="1">
+              <a:rPr sz="2700" b="1">
                 <a:solidFill>
                   <a:srgbClr val="11243F"/>
                 </a:solidFill>
@@ -4369,14 +4324,14 @@
       </p:sp>
       <p:sp>
         <p:nvSpPr>
-          <p:cNvPr id="15" name="TextBox 14"/>
+          <p:cNvPr id="14" name="TextBox 13"/>
           <p:cNvSpPr txBox="1"/>
           <p:nvPr/>
         </p:nvSpPr>
         <p:spPr>
           <a:xfrm>
-            <a:off x="8280196" y="5943600"/>
-            <a:ext cx="3454298" cy="502920"/>
+            <a:off x="8280196" y="5468112"/>
+            <a:ext cx="3454298" cy="1417320"/>
           </a:xfrm>
           <a:prstGeom prst="rect">
             <a:avLst/>
@@ -4390,13 +4345,13 @@
           <a:lstStyle/>
           <a:p>
             <a:r>
-              <a:rPr sz="1200" b="0">
+              <a:rPr sz="1100" b="0">
                 <a:solidFill>
                   <a:srgbClr val="7A828C"/>
                 </a:solidFill>
                 <a:latin typeface="Calibri"/>
               </a:rPr>
-              <a:t>APAC</a:t>
+              <a:t>UK &amp; Ireland follows closely with $200k, also showing strong growth.</a:t>
             </a:r>
           </a:p>
         </p:txBody>
@@ -4482,7 +4437,7 @@
                 </a:solidFill>
                 <a:latin typeface="Georgia"/>
               </a:rPr>
-              <a:t>Online leads with $537k, driving a $35k increase from April to May.</a:t>
+              <a:t>Online channel leads with $537k, growing by +$35k from prior period.</a:t>
             </a:r>
           </a:p>
         </p:txBody>
@@ -4574,7 +4529,7 @@
                 </a:solidFill>
                 <a:latin typeface="Calibri"/>
               </a:rPr>
-              <a:t>In May 2026, Online channel revenue reached $537k, representing 53.8% of total revenue. In-store revenue followed at $461k, showing a smaller increase of $8k from the previous month. The Online channel not only leads in total revenue but also demonstrates significant growth compared to the prior period, highlighting a strong shift towards digital sales.</a:t>
+              <a:t>In May 2026, the Online channel generated $537k, representing 53.8% of total revenue. The In-store channel followed with $461k, showing a smaller growth of +$8k compared to the previous month. The Online channel's growth of +$35k indicates a significant upward trend, solidifying its position as the primary revenue driver.</a:t>
             </a:r>
           </a:p>
         </p:txBody>
@@ -4686,7 +4641,7 @@
                 </a:solidFill>
                 <a:latin typeface="Calibri"/>
               </a:rPr>
-              <a:t>The strong growth in Online revenue indicates a successful digital strategy that should be prioritized.</a:t>
+              <a:t>Focusing on enhancing the Online channel can drive further revenue growth.</a:t>
             </a:r>
           </a:p>
           <a:p>
@@ -4702,7 +4657,7 @@
                 </a:solidFill>
                 <a:latin typeface="Calibri"/>
               </a:rPr>
-              <a:t>•  Online revenue increased by $35k from April to May.</a:t>
+              <a:t>•  Online channel accounts for 53.8% of total revenue.</a:t>
             </a:r>
           </a:p>
           <a:p>
@@ -4718,7 +4673,7 @@
                 </a:solidFill>
                 <a:latin typeface="Calibri"/>
               </a:rPr>
-              <a:t>•  In-store revenue rose by $8k in the same period.</a:t>
+              <a:t>•  In-store channel contributes $461k, less than Online.</a:t>
             </a:r>
           </a:p>
           <a:p>
@@ -4734,7 +4689,7 @@
                 </a:solidFill>
                 <a:latin typeface="Calibri"/>
               </a:rPr>
-              <a:t>•  Online accounts for over half of total revenue.</a:t>
+              <a:t>•  Online revenue increased by +$35k, the largest growth this period.</a:t>
             </a:r>
           </a:p>
         </p:txBody>
@@ -4875,8 +4830,8 @@
         </p:blipFill>
         <p:spPr>
           <a:xfrm>
-            <a:off x="3264408" y="1645920"/>
-            <a:ext cx="5669280" cy="2907323"/>
+            <a:off x="457200" y="1783080"/>
+            <a:ext cx="6949440" cy="3563815"/>
           </a:xfrm>
           <a:prstGeom prst="rect">
             <a:avLst/>
@@ -4891,8 +4846,8 @@
         </p:nvSpPr>
         <p:spPr>
           <a:xfrm>
-            <a:off x="457200" y="4572000"/>
-            <a:ext cx="11277295" cy="411480"/>
+            <a:off x="457200" y="5486400"/>
+            <a:ext cx="6949440" cy="868680"/>
           </a:xfrm>
           <a:prstGeom prst="rect">
             <a:avLst/>
@@ -4905,15 +4860,14 @@
           </a:bodyPr>
           <a:lstStyle/>
           <a:p>
-            <a:pPr algn="ctr"/>
-            <a:r>
-              <a:rPr sz="1300" b="1">
-                <a:solidFill>
-                  <a:srgbClr val="11243F"/>
+            <a:r>
+              <a:rPr sz="1100" b="0">
+                <a:solidFill>
+                  <a:srgbClr val="7A828C"/>
                 </a:solidFill>
                 <a:latin typeface="Calibri"/>
               </a:rPr>
-              <a:t>Focusing on Electronics and Home &amp; Kitchen can drive future growth.</a:t>
+              <a:t>In May 2026, Electronics dominates with total revenue of $293k, accounting for 29.4% of overall sales. Home &amp; Kitchen follows closely with $279k, showing significant growth of +$24k compared to the previous month. Beauty &amp; Wellness also performed well, increasing by +$10k to reach $248k, while Apparel and Media &amp; Entertainment saw minimal changes.</a:t>
             </a:r>
           </a:p>
         </p:txBody>
@@ -4926,14 +4880,14 @@
         </p:nvSpPr>
         <p:spPr>
           <a:xfrm>
-            <a:off x="457200" y="5074920"/>
-            <a:ext cx="3454298" cy="50800"/>
+            <a:off x="7772400" y="1783080"/>
+            <a:ext cx="3931920" cy="457200"/>
           </a:xfrm>
           <a:prstGeom prst="rect">
             <a:avLst/>
           </a:prstGeom>
           <a:solidFill>
-            <a:srgbClr val="2E6DB4"/>
+            <a:srgbClr val="11243F"/>
           </a:solidFill>
           <a:ln>
             <a:noFill/>
@@ -4955,100 +4909,43 @@
           </a:fontRef>
         </p:style>
         <p:txBody>
-          <a:bodyPr rtlCol="0" anchor="ctr"/>
+          <a:bodyPr rtlCol="0" anchor="ctr" lIns="201168" tIns="18288" bIns="18288"/>
           <a:lstStyle/>
           <a:p>
             <a:pPr algn="ctr"/>
-          </a:p>
-        </p:txBody>
-      </p:sp>
-      <p:sp>
-        <p:nvSpPr>
-          <p:cNvPr id="8" name="TextBox 7"/>
-          <p:cNvSpPr txBox="1"/>
-          <p:nvPr/>
-        </p:nvSpPr>
-        <p:spPr>
-          <a:xfrm>
-            <a:off x="457200" y="5184648"/>
-            <a:ext cx="3454298" cy="777240"/>
-          </a:xfrm>
-          <a:prstGeom prst="rect">
-            <a:avLst/>
-          </a:prstGeom>
-          <a:noFill/>
-        </p:spPr>
-        <p:txBody>
-          <a:bodyPr wrap="square">
-            <a:spAutoFit/>
-          </a:bodyPr>
-          <a:lstStyle/>
-          <a:p>
-            <a:r>
-              <a:rPr sz="3000" b="1">
-                <a:solidFill>
-                  <a:srgbClr val="11243F"/>
-                </a:solidFill>
-                <a:latin typeface="Georgia"/>
-              </a:rPr>
-              <a:t>$293k</a:t>
-            </a:r>
-          </a:p>
-        </p:txBody>
-      </p:sp>
-      <p:sp>
-        <p:nvSpPr>
-          <p:cNvPr id="9" name="TextBox 8"/>
-          <p:cNvSpPr txBox="1"/>
-          <p:nvPr/>
-        </p:nvSpPr>
-        <p:spPr>
-          <a:xfrm>
-            <a:off x="457200" y="5943600"/>
-            <a:ext cx="3454298" cy="502920"/>
-          </a:xfrm>
-          <a:prstGeom prst="rect">
-            <a:avLst/>
-          </a:prstGeom>
-          <a:noFill/>
-        </p:spPr>
-        <p:txBody>
-          <a:bodyPr wrap="square">
-            <a:spAutoFit/>
-          </a:bodyPr>
-          <a:lstStyle/>
-          <a:p>
-            <a:r>
-              <a:rPr sz="1200" b="0">
-                <a:solidFill>
-                  <a:srgbClr val="7A828C"/>
+            <a:r>
+              <a:rPr sz="1200" b="1">
+                <a:solidFill>
+                  <a:srgbClr val="FFFFFF"/>
                 </a:solidFill>
                 <a:latin typeface="Calibri"/>
               </a:rPr>
-              <a:t>Electronics</a:t>
-            </a:r>
-          </a:p>
-        </p:txBody>
-      </p:sp>
-      <p:sp>
-        <p:nvSpPr>
-          <p:cNvPr id="10" name="Rectangle 9"/>
+              <a:t>KEY TAKEAWAY</a:t>
+            </a:r>
+          </a:p>
+        </p:txBody>
+      </p:sp>
+      <p:sp>
+        <p:nvSpPr>
+          <p:cNvPr id="8" name="Rectangle 7"/>
           <p:cNvSpPr/>
           <p:nvPr/>
         </p:nvSpPr>
         <p:spPr>
           <a:xfrm>
-            <a:off x="4368698" y="5074920"/>
-            <a:ext cx="3454298" cy="50800"/>
+            <a:off x="7772400" y="2240280"/>
+            <a:ext cx="3931920" cy="3200400"/>
           </a:xfrm>
           <a:prstGeom prst="rect">
             <a:avLst/>
           </a:prstGeom>
           <a:solidFill>
-            <a:srgbClr val="2E6DB4"/>
+            <a:srgbClr val="E6E8EB"/>
           </a:solidFill>
-          <a:ln>
-            <a:noFill/>
+          <a:ln w="9525">
+            <a:solidFill>
+              <a:srgbClr val="C0C5C9"/>
+            </a:solidFill>
           </a:ln>
           <a:effectLst/>
         </p:spPr>
@@ -5067,189 +4964,70 @@
           </a:fontRef>
         </p:style>
         <p:txBody>
-          <a:bodyPr rtlCol="0" anchor="ctr"/>
-          <a:lstStyle/>
-          <a:p>
-            <a:pPr algn="ctr"/>
-          </a:p>
-        </p:txBody>
-      </p:sp>
-      <p:sp>
-        <p:nvSpPr>
-          <p:cNvPr id="11" name="TextBox 10"/>
-          <p:cNvSpPr txBox="1"/>
-          <p:nvPr/>
-        </p:nvSpPr>
-        <p:spPr>
-          <a:xfrm>
-            <a:off x="4368698" y="5184648"/>
-            <a:ext cx="3454298" cy="777240"/>
-          </a:xfrm>
-          <a:prstGeom prst="rect">
-            <a:avLst/>
-          </a:prstGeom>
-          <a:noFill/>
-        </p:spPr>
-        <p:txBody>
-          <a:bodyPr wrap="square">
-            <a:spAutoFit/>
-          </a:bodyPr>
-          <a:lstStyle/>
-          <a:p>
-            <a:r>
-              <a:rPr sz="3000" b="1">
-                <a:solidFill>
-                  <a:srgbClr val="11243F"/>
-                </a:solidFill>
-                <a:latin typeface="Georgia"/>
-              </a:rPr>
-              <a:t>$279k</a:t>
-            </a:r>
-          </a:p>
-        </p:txBody>
-      </p:sp>
-      <p:sp>
-        <p:nvSpPr>
-          <p:cNvPr id="12" name="TextBox 11"/>
-          <p:cNvSpPr txBox="1"/>
-          <p:nvPr/>
-        </p:nvSpPr>
-        <p:spPr>
-          <a:xfrm>
-            <a:off x="4368698" y="5943600"/>
-            <a:ext cx="3454298" cy="502920"/>
-          </a:xfrm>
-          <a:prstGeom prst="rect">
-            <a:avLst/>
-          </a:prstGeom>
-          <a:noFill/>
-        </p:spPr>
-        <p:txBody>
-          <a:bodyPr wrap="square">
-            <a:spAutoFit/>
-          </a:bodyPr>
-          <a:lstStyle/>
-          <a:p>
-            <a:r>
-              <a:rPr sz="1200" b="0">
-                <a:solidFill>
-                  <a:srgbClr val="7A828C"/>
+          <a:bodyPr rtlCol="0" anchor="t" wrap="square" lIns="219456" rIns="219456" tIns="237744"/>
+          <a:lstStyle/>
+          <a:p>
+            <a:pPr algn="l">
+              <a:spcAft>
+                <a:spcPts val="1600"/>
+              </a:spcAft>
+            </a:pPr>
+            <a:r>
+              <a:rPr sz="1300" b="0">
+                <a:solidFill>
+                  <a:srgbClr val="3C4450"/>
                 </a:solidFill>
                 <a:latin typeface="Calibri"/>
               </a:rPr>
-              <a:t>Home &amp; Kitchen</a:t>
-            </a:r>
-          </a:p>
-        </p:txBody>
-      </p:sp>
-      <p:sp>
-        <p:nvSpPr>
-          <p:cNvPr id="13" name="Rectangle 12"/>
-          <p:cNvSpPr/>
-          <p:nvPr/>
-        </p:nvSpPr>
-        <p:spPr>
-          <a:xfrm>
-            <a:off x="8280196" y="5074920"/>
-            <a:ext cx="3454298" cy="50800"/>
-          </a:xfrm>
-          <a:prstGeom prst="rect">
-            <a:avLst/>
-          </a:prstGeom>
-          <a:solidFill>
-            <a:srgbClr val="2E6DB4"/>
-          </a:solidFill>
-          <a:ln>
-            <a:noFill/>
-          </a:ln>
-          <a:effectLst/>
-        </p:spPr>
-        <p:style>
-          <a:lnRef idx="1">
-            <a:schemeClr val="accent1"/>
-          </a:lnRef>
-          <a:fillRef idx="3">
-            <a:schemeClr val="accent1"/>
-          </a:fillRef>
-          <a:effectRef idx="2">
-            <a:schemeClr val="accent1"/>
-          </a:effectRef>
-          <a:fontRef idx="minor">
-            <a:schemeClr val="lt1"/>
-          </a:fontRef>
-        </p:style>
-        <p:txBody>
-          <a:bodyPr rtlCol="0" anchor="ctr"/>
-          <a:lstStyle/>
-          <a:p>
-            <a:pPr algn="ctr"/>
-          </a:p>
-        </p:txBody>
-      </p:sp>
-      <p:sp>
-        <p:nvSpPr>
-          <p:cNvPr id="14" name="TextBox 13"/>
-          <p:cNvSpPr txBox="1"/>
-          <p:nvPr/>
-        </p:nvSpPr>
-        <p:spPr>
-          <a:xfrm>
-            <a:off x="8280196" y="5184648"/>
-            <a:ext cx="3454298" cy="777240"/>
-          </a:xfrm>
-          <a:prstGeom prst="rect">
-            <a:avLst/>
-          </a:prstGeom>
-          <a:noFill/>
-        </p:spPr>
-        <p:txBody>
-          <a:bodyPr wrap="square">
-            <a:spAutoFit/>
-          </a:bodyPr>
-          <a:lstStyle/>
-          <a:p>
-            <a:r>
-              <a:rPr sz="3000" b="1">
-                <a:solidFill>
-                  <a:srgbClr val="11243F"/>
-                </a:solidFill>
-                <a:latin typeface="Georgia"/>
-              </a:rPr>
-              <a:t>$248k</a:t>
-            </a:r>
-          </a:p>
-        </p:txBody>
-      </p:sp>
-      <p:sp>
-        <p:nvSpPr>
-          <p:cNvPr id="15" name="TextBox 14"/>
-          <p:cNvSpPr txBox="1"/>
-          <p:nvPr/>
-        </p:nvSpPr>
-        <p:spPr>
-          <a:xfrm>
-            <a:off x="8280196" y="5943600"/>
-            <a:ext cx="3454298" cy="502920"/>
-          </a:xfrm>
-          <a:prstGeom prst="rect">
-            <a:avLst/>
-          </a:prstGeom>
-          <a:noFill/>
-        </p:spPr>
-        <p:txBody>
-          <a:bodyPr wrap="square">
-            <a:spAutoFit/>
-          </a:bodyPr>
-          <a:lstStyle/>
-          <a:p>
-            <a:r>
-              <a:rPr sz="1200" b="0">
-                <a:solidFill>
-                  <a:srgbClr val="7A828C"/>
+              <a:t>Focusing on Home &amp; Kitchen's growth can enhance overall revenue performance.</a:t>
+            </a:r>
+          </a:p>
+          <a:p>
+            <a:pPr algn="l">
+              <a:spcAft>
+                <a:spcPts val="700"/>
+              </a:spcAft>
+            </a:pPr>
+            <a:r>
+              <a:rPr sz="1100" b="0">
+                <a:solidFill>
+                  <a:srgbClr val="3C4450"/>
                 </a:solidFill>
                 <a:latin typeface="Calibri"/>
               </a:rPr>
-              <a:t>Beauty &amp; Wellness</a:t>
+              <a:t>•  Electronics: $293k, 29.4% of total revenue</a:t>
+            </a:r>
+          </a:p>
+          <a:p>
+            <a:pPr algn="l">
+              <a:spcAft>
+                <a:spcPts val="700"/>
+              </a:spcAft>
+            </a:pPr>
+            <a:r>
+              <a:rPr sz="1100" b="0">
+                <a:solidFill>
+                  <a:srgbClr val="3C4450"/>
+                </a:solidFill>
+                <a:latin typeface="Calibri"/>
+              </a:rPr>
+              <a:t>•  Home &amp; Kitchen: $279k, +$24k growth</a:t>
+            </a:r>
+          </a:p>
+          <a:p>
+            <a:pPr algn="l">
+              <a:spcAft>
+                <a:spcPts val="700"/>
+              </a:spcAft>
+            </a:pPr>
+            <a:r>
+              <a:rPr sz="1100" b="0">
+                <a:solidFill>
+                  <a:srgbClr val="3C4450"/>
+                </a:solidFill>
+                <a:latin typeface="Calibri"/>
+              </a:rPr>
+              <a:t>•  Beauty &amp; Wellness: $248k, +$10k growth</a:t>
             </a:r>
           </a:p>
         </p:txBody>
@@ -5335,7 +5113,7 @@
                 </a:solidFill>
                 <a:latin typeface="Georgia"/>
               </a:rPr>
-              <a:t>Wireless Earbuds lead with $163k, driving 16.4% of total revenue.</a:t>
+              <a:t>Wireless Earbuds lead with $163k, while Air Fryer grows by $15k.</a:t>
             </a:r>
           </a:p>
         </p:txBody>
@@ -5427,7 +5205,7 @@
                 </a:solidFill>
                 <a:latin typeface="Calibri"/>
               </a:rPr>
-              <a:t>In May 2026, Wireless Earbuds generated $163k, establishing itself as the top product and contributing 16.4% of total revenue. The Air Fryer follows closely with $133k, showing significant growth of +$15k from the previous month. The Cookware Set also performed well, increasing by +$12k to reach $106k, indicating strong demand in the kitchen appliance segment.</a:t>
+              <a:t>In May 2026, Wireless Earbuds generated $163k, making it the top product by revenue. The Air Fryer followed with $133k, showing the largest growth of $15k from the previous month. This highlights a strong concentration in the top two products, which together account for a significant portion of total revenue.</a:t>
             </a:r>
           </a:p>
         </p:txBody>
@@ -5539,7 +5317,7 @@
                 </a:solidFill>
                 <a:latin typeface="Calibri"/>
               </a:rPr>
-              <a:t>Focusing on high-performing products like Wireless Earbuds and Air Fryer can enhance growth.</a:t>
+              <a:t>Focusing on top-performing products can drive further revenue growth.</a:t>
             </a:r>
           </a:p>
           <a:p>
@@ -5555,7 +5333,7 @@
                 </a:solidFill>
                 <a:latin typeface="Calibri"/>
               </a:rPr>
-              <a:t>•  Wireless Earbuds dominate with $163k in revenue.</a:t>
+              <a:t>•  Wireless Earbuds at $163k dominate the product lineup.</a:t>
             </a:r>
           </a:p>
           <a:p>
@@ -5571,7 +5349,7 @@
                 </a:solidFill>
                 <a:latin typeface="Calibri"/>
               </a:rPr>
-              <a:t>•  Air Fryer shows the largest increase of +$15k.</a:t>
+              <a:t>•  Air Fryer shows the most growth with a $15k increase.</a:t>
             </a:r>
           </a:p>
           <a:p>
@@ -5587,7 +5365,7 @@
                 </a:solidFill>
                 <a:latin typeface="Calibri"/>
               </a:rPr>
-              <a:t>•  Cookware Set maintains strong performance at $106k.</a:t>
+              <a:t>•  Top two products represent a substantial revenue concentration.</a:t>
             </a:r>
           </a:p>
         </p:txBody>
@@ -5746,7 +5524,7 @@
                 </a:solidFill>
                 <a:latin typeface="Calibri"/>
               </a:rPr>
-              <a:t>1.   Increase marketing investments in the Online channel to capitalize on $537k in sales.</a:t>
+              <a:t>1.   Enhance online marketing strategies to capitalize on the $537k from the Online channel.</a:t>
             </a:r>
           </a:p>
           <a:p>
@@ -5762,7 +5540,7 @@
                 </a:solidFill>
                 <a:latin typeface="Calibri"/>
               </a:rPr>
-              <a:t>2.   Enhance product offerings in the Electronics category, which generated $293k, to drive growth.</a:t>
+              <a:t>2.   Increase inventory for Wireless Earbuds to support the $163k sales momentum.</a:t>
             </a:r>
           </a:p>
           <a:p>
@@ -5778,7 +5556,7 @@
                 </a:solidFill>
                 <a:latin typeface="Calibri"/>
               </a:rPr>
-              <a:t>3.   Address the decline of the Coffee Grinder product by evaluating pricing and promotional strategies.</a:t>
+              <a:t>3.   Investigate the decline of Coffee Grinder to identify causes and implement corrective actions.</a:t>
             </a:r>
           </a:p>
           <a:p>
@@ -5794,7 +5572,7 @@
                 </a:solidFill>
                 <a:latin typeface="Calibri"/>
               </a:rPr>
-              <a:t>4.   Focus on expanding the North America region, contributing $262k, to maximize regional performance.</a:t>
+              <a:t>4.   Focus on expanding the Electronics category, which contributes $293k, to drive further growth.</a:t>
             </a:r>
           </a:p>
         </p:txBody>

--- a/app/examples/retail_sales/report.pptx
+++ b/app/examples/retail_sales/report.pptx
@@ -3110,7 +3110,7 @@
             <a:avLst/>
           </a:prstGeom>
           <a:solidFill>
-            <a:srgbClr val="11243F"/>
+            <a:srgbClr val="163E66"/>
           </a:solidFill>
           <a:ln>
             <a:noFill/>
@@ -3168,7 +3168,7 @@
                 </a:solidFill>
                 <a:latin typeface="Georgia"/>
               </a:rPr>
-              <a:t>Revenue Growth and Channel Insights</a:t>
+              <a:t>May 2026 Revenue Performance</a:t>
             </a:r>
           </a:p>
         </p:txBody>
@@ -3328,11 +3328,11 @@
             <a:r>
               <a:rPr sz="3000" b="1">
                 <a:solidFill>
-                  <a:srgbClr val="11243F"/>
+                  <a:srgbClr val="163E66"/>
                 </a:solidFill>
                 <a:latin typeface="Georgia"/>
               </a:rPr>
-              <a:t>Total revenue growth indicates strong performance in key areas.</a:t>
+              <a:t>Revenue growth indicates strong market positioning and channel effectiveness.</a:t>
             </a:r>
           </a:p>
         </p:txBody>
@@ -3413,7 +3413,7 @@
                 </a:solidFill>
                 <a:latin typeface="Calibri"/>
               </a:rPr>
-              <a:t>Total revenue reached $998k in 2026-05, up +4.5% from $955k.</a:t>
+              <a:t>Total revenue reached $998k in May 2026, reflecting a growth of +4.5%.</a:t>
             </a:r>
           </a:p>
           <a:p>
@@ -3485,7 +3485,7 @@
                 </a:solidFill>
                 <a:latin typeface="Calibri"/>
               </a:rPr>
-              <a:t>Electronics category sales were $293k, making up 29.4% of total revenue.</a:t>
+              <a:t>Electronics category sales totaled $293k, making up 29.4% of total revenue.</a:t>
             </a:r>
           </a:p>
           <a:p>
@@ -3509,31 +3509,7 @@
                 </a:solidFill>
                 <a:latin typeface="Calibri"/>
               </a:rPr>
-              <a:t>Wireless Earbuds sales totaled $163k, contributing 16.4% to total revenue.</a:t>
-            </a:r>
-          </a:p>
-          <a:p>
-            <a:pPr>
-              <a:spcAft>
-                <a:spcPts val="1600"/>
-              </a:spcAft>
-            </a:pPr>
-            <a:r>
-              <a:rPr sz="1600" b="1">
-                <a:solidFill>
-                  <a:srgbClr val="2E6DB4"/>
-                </a:solidFill>
-              </a:rPr>
-              <a:t>●  </a:t>
-            </a:r>
-            <a:r>
-              <a:rPr sz="1600" b="0">
-                <a:solidFill>
-                  <a:srgbClr val="3C4450"/>
-                </a:solidFill>
-                <a:latin typeface="Calibri"/>
-              </a:rPr>
-              <a:t>Coffee Grinder sales declined by -$2k compared to the previous month.</a:t>
+              <a:t>The Coffee Grinder experienced a decline of -$2k compared to the prior month.</a:t>
             </a:r>
           </a:p>
         </p:txBody>
@@ -3615,11 +3591,11 @@
             <a:r>
               <a:rPr sz="3000" b="1">
                 <a:solidFill>
-                  <a:srgbClr val="11243F"/>
+                  <a:srgbClr val="163E66"/>
                 </a:solidFill>
                 <a:latin typeface="Georgia"/>
               </a:rPr>
-              <a:t>Total revenue increased to $998k in May, up $43k from April.</a:t>
+              <a:t>Total revenue increased by $43k to $998k in 2026-05, indicating growth.</a:t>
             </a:r>
           </a:p>
         </p:txBody>
@@ -3674,8 +3650,8 @@
         </p:blipFill>
         <p:spPr>
           <a:xfrm>
-            <a:off x="457200" y="1783080"/>
-            <a:ext cx="6949440" cy="3563815"/>
+            <a:off x="914400" y="1554480"/>
+            <a:ext cx="10332720" cy="3061547"/>
           </a:xfrm>
           <a:prstGeom prst="rect">
             <a:avLst/>
@@ -3684,54 +3660,20 @@
       </p:pic>
       <p:sp>
         <p:nvSpPr>
-          <p:cNvPr id="6" name="TextBox 5"/>
-          <p:cNvSpPr txBox="1"/>
-          <p:nvPr/>
-        </p:nvSpPr>
-        <p:spPr>
-          <a:xfrm>
-            <a:off x="457200" y="5486400"/>
-            <a:ext cx="6949440" cy="868680"/>
-          </a:xfrm>
-          <a:prstGeom prst="rect">
-            <a:avLst/>
-          </a:prstGeom>
-          <a:noFill/>
-        </p:spPr>
-        <p:txBody>
-          <a:bodyPr wrap="square">
-            <a:spAutoFit/>
-          </a:bodyPr>
-          <a:lstStyle/>
-          <a:p>
-            <a:r>
-              <a:rPr sz="1100" b="0">
-                <a:solidFill>
-                  <a:srgbClr val="7A828C"/>
-                </a:solidFill>
-                <a:latin typeface="Calibri"/>
-              </a:rPr>
-              <a:t>In May 2026, total revenue reached $998k, reflecting a growth of $43k or +4.5% compared to April's $955k. This upward trend follows a recent pattern of fluctuating monthly revenues, with a notable peak of $1.41M in December 2025. The last twelve months show a seasonal peak in December, indicating potential for future growth during similar periods.</a:t>
-            </a:r>
-          </a:p>
-        </p:txBody>
-      </p:sp>
-      <p:sp>
-        <p:nvSpPr>
-          <p:cNvPr id="7" name="Rectangle 6"/>
+          <p:cNvPr id="6" name="Rectangle 5"/>
           <p:cNvSpPr/>
           <p:nvPr/>
         </p:nvSpPr>
         <p:spPr>
           <a:xfrm>
-            <a:off x="7772400" y="1783080"/>
-            <a:ext cx="3931920" cy="457200"/>
+            <a:off x="457200" y="4754880"/>
+            <a:ext cx="2510713" cy="50800"/>
           </a:xfrm>
           <a:prstGeom prst="rect">
             <a:avLst/>
           </a:prstGeom>
           <a:solidFill>
-            <a:srgbClr val="11243F"/>
+            <a:srgbClr val="2E6DB4"/>
           </a:solidFill>
           <a:ln>
             <a:noFill/>
@@ -3753,43 +3695,100 @@
           </a:fontRef>
         </p:style>
         <p:txBody>
-          <a:bodyPr rtlCol="0" anchor="ctr" lIns="201168" tIns="18288" bIns="18288"/>
+          <a:bodyPr rtlCol="0" anchor="ctr"/>
           <a:lstStyle/>
           <a:p>
             <a:pPr algn="ctr"/>
-            <a:r>
-              <a:rPr sz="1200" b="1">
-                <a:solidFill>
-                  <a:srgbClr val="FFFFFF"/>
+          </a:p>
+        </p:txBody>
+      </p:sp>
+      <p:sp>
+        <p:nvSpPr>
+          <p:cNvPr id="7" name="TextBox 6"/>
+          <p:cNvSpPr txBox="1"/>
+          <p:nvPr/>
+        </p:nvSpPr>
+        <p:spPr>
+          <a:xfrm>
+            <a:off x="457200" y="4846320"/>
+            <a:ext cx="2510713" cy="640080"/>
+          </a:xfrm>
+          <a:prstGeom prst="rect">
+            <a:avLst/>
+          </a:prstGeom>
+          <a:noFill/>
+        </p:spPr>
+        <p:txBody>
+          <a:bodyPr wrap="square">
+            <a:spAutoFit/>
+          </a:bodyPr>
+          <a:lstStyle/>
+          <a:p>
+            <a:r>
+              <a:rPr sz="2600" b="1">
+                <a:solidFill>
+                  <a:srgbClr val="163E66"/>
+                </a:solidFill>
+                <a:latin typeface="Georgia"/>
+              </a:rPr>
+              <a:t>$998k</a:t>
+            </a:r>
+          </a:p>
+        </p:txBody>
+      </p:sp>
+      <p:sp>
+        <p:nvSpPr>
+          <p:cNvPr id="8" name="TextBox 7"/>
+          <p:cNvSpPr txBox="1"/>
+          <p:nvPr/>
+        </p:nvSpPr>
+        <p:spPr>
+          <a:xfrm>
+            <a:off x="457200" y="5468112"/>
+            <a:ext cx="2510713" cy="1417320"/>
+          </a:xfrm>
+          <a:prstGeom prst="rect">
+            <a:avLst/>
+          </a:prstGeom>
+          <a:noFill/>
+        </p:spPr>
+        <p:txBody>
+          <a:bodyPr wrap="square">
+            <a:spAutoFit/>
+          </a:bodyPr>
+          <a:lstStyle/>
+          <a:p>
+            <a:r>
+              <a:rPr sz="1100" b="0">
+                <a:solidFill>
+                  <a:srgbClr val="7A828C"/>
                 </a:solidFill>
                 <a:latin typeface="Calibri"/>
               </a:rPr>
-              <a:t>KEY TAKEAWAY</a:t>
-            </a:r>
-          </a:p>
-        </p:txBody>
-      </p:sp>
-      <p:sp>
-        <p:nvSpPr>
-          <p:cNvPr id="8" name="Rectangle 7"/>
+              <a:t>Latest month (2026-05)</a:t>
+            </a:r>
+          </a:p>
+        </p:txBody>
+      </p:sp>
+      <p:sp>
+        <p:nvSpPr>
+          <p:cNvPr id="9" name="Rectangle 8"/>
           <p:cNvSpPr/>
           <p:nvPr/>
         </p:nvSpPr>
         <p:spPr>
           <a:xfrm>
-            <a:off x="7772400" y="2240280"/>
-            <a:ext cx="3931920" cy="3200400"/>
+            <a:off x="3379393" y="4754880"/>
+            <a:ext cx="2510713" cy="50800"/>
           </a:xfrm>
           <a:prstGeom prst="rect">
             <a:avLst/>
           </a:prstGeom>
           <a:solidFill>
-            <a:srgbClr val="E6E8EB"/>
+            <a:srgbClr val="2E6DB4"/>
           </a:solidFill>
-          <a:ln w="9525">
-            <a:solidFill>
-              <a:srgbClr val="C0C5C9"/>
-            </a:solidFill>
+          <a:ln>
+            <a:noFill/>
           </a:ln>
           <a:effectLst/>
         </p:spPr>
@@ -3808,70 +3807,301 @@
           </a:fontRef>
         </p:style>
         <p:txBody>
-          <a:bodyPr rtlCol="0" anchor="t" wrap="square" lIns="219456" rIns="219456" tIns="237744"/>
-          <a:lstStyle/>
-          <a:p>
-            <a:pPr algn="l">
-              <a:spcAft>
-                <a:spcPts val="1600"/>
-              </a:spcAft>
-            </a:pPr>
-            <a:r>
-              <a:rPr sz="1300" b="0">
-                <a:solidFill>
-                  <a:srgbClr val="3C4450"/>
+          <a:bodyPr rtlCol="0" anchor="ctr"/>
+          <a:lstStyle/>
+          <a:p>
+            <a:pPr algn="ctr"/>
+          </a:p>
+        </p:txBody>
+      </p:sp>
+      <p:sp>
+        <p:nvSpPr>
+          <p:cNvPr id="10" name="TextBox 9"/>
+          <p:cNvSpPr txBox="1"/>
+          <p:nvPr/>
+        </p:nvSpPr>
+        <p:spPr>
+          <a:xfrm>
+            <a:off x="3379393" y="4846320"/>
+            <a:ext cx="2510713" cy="640080"/>
+          </a:xfrm>
+          <a:prstGeom prst="rect">
+            <a:avLst/>
+          </a:prstGeom>
+          <a:noFill/>
+        </p:spPr>
+        <p:txBody>
+          <a:bodyPr wrap="square">
+            <a:spAutoFit/>
+          </a:bodyPr>
+          <a:lstStyle/>
+          <a:p>
+            <a:r>
+              <a:rPr sz="2600" b="1">
+                <a:solidFill>
+                  <a:srgbClr val="163E66"/>
+                </a:solidFill>
+                <a:latin typeface="Georgia"/>
+              </a:rPr>
+              <a:t>$1.41M</a:t>
+            </a:r>
+          </a:p>
+        </p:txBody>
+      </p:sp>
+      <p:sp>
+        <p:nvSpPr>
+          <p:cNvPr id="11" name="TextBox 10"/>
+          <p:cNvSpPr txBox="1"/>
+          <p:nvPr/>
+        </p:nvSpPr>
+        <p:spPr>
+          <a:xfrm>
+            <a:off x="3379393" y="5468112"/>
+            <a:ext cx="2510713" cy="1417320"/>
+          </a:xfrm>
+          <a:prstGeom prst="rect">
+            <a:avLst/>
+          </a:prstGeom>
+          <a:noFill/>
+        </p:spPr>
+        <p:txBody>
+          <a:bodyPr wrap="square">
+            <a:spAutoFit/>
+          </a:bodyPr>
+          <a:lstStyle/>
+          <a:p>
+            <a:r>
+              <a:rPr sz="1100" b="0">
+                <a:solidFill>
+                  <a:srgbClr val="7A828C"/>
                 </a:solidFill>
                 <a:latin typeface="Calibri"/>
               </a:rPr>
-              <a:t>Sustained revenue growth in May suggests positive momentum heading into the next quarter.</a:t>
-            </a:r>
-          </a:p>
-          <a:p>
-            <a:pPr algn="l">
-              <a:spcAft>
-                <a:spcPts val="700"/>
-              </a:spcAft>
-            </a:pPr>
+              <a:t>Peak month (2025-12)</a:t>
+            </a:r>
+          </a:p>
+        </p:txBody>
+      </p:sp>
+      <p:sp>
+        <p:nvSpPr>
+          <p:cNvPr id="12" name="Rectangle 11"/>
+          <p:cNvSpPr/>
+          <p:nvPr/>
+        </p:nvSpPr>
+        <p:spPr>
+          <a:xfrm>
+            <a:off x="6301587" y="4754880"/>
+            <a:ext cx="2510713" cy="50800"/>
+          </a:xfrm>
+          <a:prstGeom prst="rect">
+            <a:avLst/>
+          </a:prstGeom>
+          <a:solidFill>
+            <a:srgbClr val="2E6DB4"/>
+          </a:solidFill>
+          <a:ln>
+            <a:noFill/>
+          </a:ln>
+          <a:effectLst/>
+        </p:spPr>
+        <p:style>
+          <a:lnRef idx="1">
+            <a:schemeClr val="accent1"/>
+          </a:lnRef>
+          <a:fillRef idx="3">
+            <a:schemeClr val="accent1"/>
+          </a:fillRef>
+          <a:effectRef idx="2">
+            <a:schemeClr val="accent1"/>
+          </a:effectRef>
+          <a:fontRef idx="minor">
+            <a:schemeClr val="lt1"/>
+          </a:fontRef>
+        </p:style>
+        <p:txBody>
+          <a:bodyPr rtlCol="0" anchor="ctr"/>
+          <a:lstStyle/>
+          <a:p>
+            <a:pPr algn="ctr"/>
+          </a:p>
+        </p:txBody>
+      </p:sp>
+      <p:sp>
+        <p:nvSpPr>
+          <p:cNvPr id="13" name="TextBox 12"/>
+          <p:cNvSpPr txBox="1"/>
+          <p:nvPr/>
+        </p:nvSpPr>
+        <p:spPr>
+          <a:xfrm>
+            <a:off x="6301587" y="4846320"/>
+            <a:ext cx="2510713" cy="640080"/>
+          </a:xfrm>
+          <a:prstGeom prst="rect">
+            <a:avLst/>
+          </a:prstGeom>
+          <a:noFill/>
+        </p:spPr>
+        <p:txBody>
+          <a:bodyPr wrap="square">
+            <a:spAutoFit/>
+          </a:bodyPr>
+          <a:lstStyle/>
+          <a:p>
+            <a:r>
+              <a:rPr sz="2600" b="1">
+                <a:solidFill>
+                  <a:srgbClr val="163E66"/>
+                </a:solidFill>
+                <a:latin typeface="Georgia"/>
+              </a:rPr>
+              <a:t>$753k</a:t>
+            </a:r>
+          </a:p>
+        </p:txBody>
+      </p:sp>
+      <p:sp>
+        <p:nvSpPr>
+          <p:cNvPr id="14" name="TextBox 13"/>
+          <p:cNvSpPr txBox="1"/>
+          <p:nvPr/>
+        </p:nvSpPr>
+        <p:spPr>
+          <a:xfrm>
+            <a:off x="6301587" y="5468112"/>
+            <a:ext cx="2510713" cy="1417320"/>
+          </a:xfrm>
+          <a:prstGeom prst="rect">
+            <a:avLst/>
+          </a:prstGeom>
+          <a:noFill/>
+        </p:spPr>
+        <p:txBody>
+          <a:bodyPr wrap="square">
+            <a:spAutoFit/>
+          </a:bodyPr>
+          <a:lstStyle/>
+          <a:p>
             <a:r>
               <a:rPr sz="1100" b="0">
                 <a:solidFill>
-                  <a:srgbClr val="3C4450"/>
+                  <a:srgbClr val="7A828C"/>
                 </a:solidFill>
                 <a:latin typeface="Calibri"/>
               </a:rPr>
-              <a:t>•  May's revenue growth continues the upward trend from April.</a:t>
-            </a:r>
-          </a:p>
-          <a:p>
-            <a:pPr algn="l">
-              <a:spcAft>
-                <a:spcPts val="700"/>
-              </a:spcAft>
-            </a:pPr>
+              <a:t>Lowest month (2026-02)</a:t>
+            </a:r>
+          </a:p>
+        </p:txBody>
+      </p:sp>
+      <p:sp>
+        <p:nvSpPr>
+          <p:cNvPr id="15" name="Rectangle 14"/>
+          <p:cNvSpPr/>
+          <p:nvPr/>
+        </p:nvSpPr>
+        <p:spPr>
+          <a:xfrm>
+            <a:off x="9223781" y="4754880"/>
+            <a:ext cx="2510713" cy="50800"/>
+          </a:xfrm>
+          <a:prstGeom prst="rect">
+            <a:avLst/>
+          </a:prstGeom>
+          <a:solidFill>
+            <a:srgbClr val="2E6DB4"/>
+          </a:solidFill>
+          <a:ln>
+            <a:noFill/>
+          </a:ln>
+          <a:effectLst/>
+        </p:spPr>
+        <p:style>
+          <a:lnRef idx="1">
+            <a:schemeClr val="accent1"/>
+          </a:lnRef>
+          <a:fillRef idx="3">
+            <a:schemeClr val="accent1"/>
+          </a:fillRef>
+          <a:effectRef idx="2">
+            <a:schemeClr val="accent1"/>
+          </a:effectRef>
+          <a:fontRef idx="minor">
+            <a:schemeClr val="lt1"/>
+          </a:fontRef>
+        </p:style>
+        <p:txBody>
+          <a:bodyPr rtlCol="0" anchor="ctr"/>
+          <a:lstStyle/>
+          <a:p>
+            <a:pPr algn="ctr"/>
+          </a:p>
+        </p:txBody>
+      </p:sp>
+      <p:sp>
+        <p:nvSpPr>
+          <p:cNvPr id="16" name="TextBox 15"/>
+          <p:cNvSpPr txBox="1"/>
+          <p:nvPr/>
+        </p:nvSpPr>
+        <p:spPr>
+          <a:xfrm>
+            <a:off x="9223781" y="4846320"/>
+            <a:ext cx="2510713" cy="640080"/>
+          </a:xfrm>
+          <a:prstGeom prst="rect">
+            <a:avLst/>
+          </a:prstGeom>
+          <a:noFill/>
+        </p:spPr>
+        <p:txBody>
+          <a:bodyPr wrap="square">
+            <a:spAutoFit/>
+          </a:bodyPr>
+          <a:lstStyle/>
+          <a:p>
+            <a:r>
+              <a:rPr sz="2600" b="1">
+                <a:solidFill>
+                  <a:srgbClr val="163E66"/>
+                </a:solidFill>
+                <a:latin typeface="Georgia"/>
+              </a:rPr>
+              <a:t>+$96k</a:t>
+            </a:r>
+          </a:p>
+        </p:txBody>
+      </p:sp>
+      <p:sp>
+        <p:nvSpPr>
+          <p:cNvPr id="17" name="TextBox 16"/>
+          <p:cNvSpPr txBox="1"/>
+          <p:nvPr/>
+        </p:nvSpPr>
+        <p:spPr>
+          <a:xfrm>
+            <a:off x="9223781" y="5468112"/>
+            <a:ext cx="2510713" cy="1417320"/>
+          </a:xfrm>
+          <a:prstGeom prst="rect">
+            <a:avLst/>
+          </a:prstGeom>
+          <a:noFill/>
+        </p:spPr>
+        <p:txBody>
+          <a:bodyPr wrap="square">
+            <a:spAutoFit/>
+          </a:bodyPr>
+          <a:lstStyle/>
+          <a:p>
             <a:r>
               <a:rPr sz="1100" b="0">
                 <a:solidFill>
-                  <a:srgbClr val="3C4450"/>
+                  <a:srgbClr val="7A828C"/>
                 </a:solidFill>
                 <a:latin typeface="Calibri"/>
               </a:rPr>
-              <a:t>•  December 2025 marked the peak month at $1.41M.</a:t>
-            </a:r>
-          </a:p>
-          <a:p>
-            <a:pPr algn="l">
-              <a:spcAft>
-                <a:spcPts val="700"/>
-              </a:spcAft>
-            </a:pPr>
-            <a:r>
-              <a:rPr sz="1100" b="0">
-                <a:solidFill>
-                  <a:srgbClr val="3C4450"/>
-                </a:solidFill>
-                <a:latin typeface="Calibri"/>
-              </a:rPr>
-              <a:t>•  Recent months show variability, with significant fluctuations in revenue.</a:t>
+              <a:t>Change since 2025-06</a:t>
             </a:r>
           </a:p>
         </p:txBody>
@@ -3953,11 +4183,11 @@
             <a:r>
               <a:rPr sz="3000" b="1">
                 <a:solidFill>
-                  <a:srgbClr val="11243F"/>
+                  <a:srgbClr val="163E66"/>
                 </a:solidFill>
                 <a:latin typeface="Georgia"/>
               </a:rPr>
-              <a:t>North America leads with $262k, while EMEA grows by $14k.</a:t>
+              <a:t>North America leads with $262k, while EMEA grows by +$14k.</a:t>
             </a:r>
           </a:p>
         </p:txBody>
@@ -4012,8 +4242,8 @@
         </p:blipFill>
         <p:spPr>
           <a:xfrm>
-            <a:off x="914400" y="1554480"/>
-            <a:ext cx="10332720" cy="3061547"/>
+            <a:off x="457200" y="1783080"/>
+            <a:ext cx="6949440" cy="3563815"/>
           </a:xfrm>
           <a:prstGeom prst="rect">
             <a:avLst/>
@@ -4022,20 +4252,54 @@
       </p:pic>
       <p:sp>
         <p:nvSpPr>
-          <p:cNvPr id="6" name="Rectangle 5"/>
+          <p:cNvPr id="6" name="TextBox 5"/>
+          <p:cNvSpPr txBox="1"/>
+          <p:nvPr/>
+        </p:nvSpPr>
+        <p:spPr>
+          <a:xfrm>
+            <a:off x="457200" y="5486400"/>
+            <a:ext cx="6949440" cy="868680"/>
+          </a:xfrm>
+          <a:prstGeom prst="rect">
+            <a:avLst/>
+          </a:prstGeom>
+          <a:noFill/>
+        </p:spPr>
+        <p:txBody>
+          <a:bodyPr wrap="square">
+            <a:spAutoFit/>
+          </a:bodyPr>
+          <a:lstStyle/>
+          <a:p>
+            <a:r>
+              <a:rPr sz="1100" b="0">
+                <a:solidFill>
+                  <a:srgbClr val="7A828C"/>
+                </a:solidFill>
+                <a:latin typeface="Calibri"/>
+              </a:rPr>
+              <a:t>In the revenue breakdown for 2026-05, North America stands out with a total of $262k, representing the highest contribution among all regions. EMEA follows with a total of $219k, showing a significant increase of +$14k compared to the previous period. The concentration of revenue is highest in North America, followed by EMEA and APAC, which totals $202k.</a:t>
+            </a:r>
+          </a:p>
+        </p:txBody>
+      </p:sp>
+      <p:sp>
+        <p:nvSpPr>
+          <p:cNvPr id="7" name="Rectangle 6"/>
           <p:cNvSpPr/>
           <p:nvPr/>
         </p:nvSpPr>
         <p:spPr>
           <a:xfrm>
-            <a:off x="457200" y="4754880"/>
-            <a:ext cx="3454298" cy="50800"/>
+            <a:off x="7772400" y="1783080"/>
+            <a:ext cx="3931920" cy="457200"/>
           </a:xfrm>
           <a:prstGeom prst="rect">
             <a:avLst/>
           </a:prstGeom>
           <a:solidFill>
-            <a:srgbClr val="2E6DB4"/>
+            <a:srgbClr val="163E66"/>
           </a:solidFill>
           <a:ln>
             <a:noFill/>
@@ -4057,100 +4321,43 @@
           </a:fontRef>
         </p:style>
         <p:txBody>
-          <a:bodyPr rtlCol="0" anchor="ctr"/>
+          <a:bodyPr rtlCol="0" anchor="ctr" lIns="201168" tIns="18288" bIns="18288"/>
           <a:lstStyle/>
           <a:p>
             <a:pPr algn="ctr"/>
-          </a:p>
-        </p:txBody>
-      </p:sp>
-      <p:sp>
-        <p:nvSpPr>
-          <p:cNvPr id="7" name="TextBox 6"/>
-          <p:cNvSpPr txBox="1"/>
-          <p:nvPr/>
-        </p:nvSpPr>
-        <p:spPr>
-          <a:xfrm>
-            <a:off x="457200" y="4846320"/>
-            <a:ext cx="3454298" cy="640080"/>
-          </a:xfrm>
-          <a:prstGeom prst="rect">
-            <a:avLst/>
-          </a:prstGeom>
-          <a:noFill/>
-        </p:spPr>
-        <p:txBody>
-          <a:bodyPr wrap="square">
-            <a:spAutoFit/>
-          </a:bodyPr>
-          <a:lstStyle/>
-          <a:p>
-            <a:r>
-              <a:rPr sz="2700" b="1">
-                <a:solidFill>
-                  <a:srgbClr val="11243F"/>
-                </a:solidFill>
-                <a:latin typeface="Georgia"/>
-              </a:rPr>
-              <a:t>$262k</a:t>
-            </a:r>
-          </a:p>
-        </p:txBody>
-      </p:sp>
-      <p:sp>
-        <p:nvSpPr>
-          <p:cNvPr id="8" name="TextBox 7"/>
-          <p:cNvSpPr txBox="1"/>
-          <p:nvPr/>
-        </p:nvSpPr>
-        <p:spPr>
-          <a:xfrm>
-            <a:off x="457200" y="5468112"/>
-            <a:ext cx="3454298" cy="1417320"/>
-          </a:xfrm>
-          <a:prstGeom prst="rect">
-            <a:avLst/>
-          </a:prstGeom>
-          <a:noFill/>
-        </p:spPr>
-        <p:txBody>
-          <a:bodyPr wrap="square">
-            <a:spAutoFit/>
-          </a:bodyPr>
-          <a:lstStyle/>
-          <a:p>
-            <a:r>
-              <a:rPr sz="1100" b="0">
-                <a:solidFill>
-                  <a:srgbClr val="7A828C"/>
+            <a:r>
+              <a:rPr sz="1200" b="1">
+                <a:solidFill>
+                  <a:srgbClr val="FFFFFF"/>
                 </a:solidFill>
                 <a:latin typeface="Calibri"/>
               </a:rPr>
-              <a:t>North America contributes 26.2% of total revenue.</a:t>
-            </a:r>
-          </a:p>
-        </p:txBody>
-      </p:sp>
-      <p:sp>
-        <p:nvSpPr>
-          <p:cNvPr id="9" name="Rectangle 8"/>
+              <a:t>KEY TAKEAWAY</a:t>
+            </a:r>
+          </a:p>
+        </p:txBody>
+      </p:sp>
+      <p:sp>
+        <p:nvSpPr>
+          <p:cNvPr id="8" name="Rectangle 7"/>
           <p:cNvSpPr/>
           <p:nvPr/>
         </p:nvSpPr>
         <p:spPr>
           <a:xfrm>
-            <a:off x="4368698" y="4754880"/>
-            <a:ext cx="3454298" cy="50800"/>
+            <a:off x="7772400" y="2240280"/>
+            <a:ext cx="3931920" cy="3200400"/>
           </a:xfrm>
           <a:prstGeom prst="rect">
             <a:avLst/>
           </a:prstGeom>
           <a:solidFill>
-            <a:srgbClr val="2E6DB4"/>
+            <a:srgbClr val="E6E8EB"/>
           </a:solidFill>
-          <a:ln>
-            <a:noFill/>
+          <a:ln w="9525">
+            <a:solidFill>
+              <a:srgbClr val="C0C5C9"/>
+            </a:solidFill>
           </a:ln>
           <a:effectLst/>
         </p:spPr>
@@ -4169,189 +4376,70 @@
           </a:fontRef>
         </p:style>
         <p:txBody>
-          <a:bodyPr rtlCol="0" anchor="ctr"/>
-          <a:lstStyle/>
-          <a:p>
-            <a:pPr algn="ctr"/>
-          </a:p>
-        </p:txBody>
-      </p:sp>
-      <p:sp>
-        <p:nvSpPr>
-          <p:cNvPr id="10" name="TextBox 9"/>
-          <p:cNvSpPr txBox="1"/>
-          <p:nvPr/>
-        </p:nvSpPr>
-        <p:spPr>
-          <a:xfrm>
-            <a:off x="4368698" y="4846320"/>
-            <a:ext cx="3454298" cy="640080"/>
-          </a:xfrm>
-          <a:prstGeom prst="rect">
-            <a:avLst/>
-          </a:prstGeom>
-          <a:noFill/>
-        </p:spPr>
-        <p:txBody>
-          <a:bodyPr wrap="square">
-            <a:spAutoFit/>
-          </a:bodyPr>
-          <a:lstStyle/>
-          <a:p>
-            <a:r>
-              <a:rPr sz="2700" b="1">
-                <a:solidFill>
-                  <a:srgbClr val="11243F"/>
-                </a:solidFill>
-                <a:latin typeface="Georgia"/>
-              </a:rPr>
-              <a:t>$219k</a:t>
-            </a:r>
-          </a:p>
-        </p:txBody>
-      </p:sp>
-      <p:sp>
-        <p:nvSpPr>
-          <p:cNvPr id="11" name="TextBox 10"/>
-          <p:cNvSpPr txBox="1"/>
-          <p:nvPr/>
-        </p:nvSpPr>
-        <p:spPr>
-          <a:xfrm>
-            <a:off x="4368698" y="5468112"/>
-            <a:ext cx="3454298" cy="1417320"/>
-          </a:xfrm>
-          <a:prstGeom prst="rect">
-            <a:avLst/>
-          </a:prstGeom>
-          <a:noFill/>
-        </p:spPr>
-        <p:txBody>
-          <a:bodyPr wrap="square">
-            <a:spAutoFit/>
-          </a:bodyPr>
-          <a:lstStyle/>
-          <a:p>
+          <a:bodyPr rtlCol="0" anchor="t" wrap="square" lIns="219456" rIns="219456" tIns="237744"/>
+          <a:lstStyle/>
+          <a:p>
+            <a:pPr algn="l">
+              <a:spcAft>
+                <a:spcPts val="1600"/>
+              </a:spcAft>
+            </a:pPr>
+            <a:r>
+              <a:rPr sz="1300" b="0">
+                <a:solidFill>
+                  <a:srgbClr val="3C4450"/>
+                </a:solidFill>
+                <a:latin typeface="Calibri"/>
+              </a:rPr>
+              <a:t>Focusing on EMEA's growth can enhance overall revenue performance.</a:t>
+            </a:r>
+          </a:p>
+          <a:p>
+            <a:pPr algn="l">
+              <a:spcAft>
+                <a:spcPts val="700"/>
+              </a:spcAft>
+            </a:pPr>
             <a:r>
               <a:rPr sz="1100" b="0">
                 <a:solidFill>
-                  <a:srgbClr val="7A828C"/>
+                  <a:srgbClr val="3C4450"/>
                 </a:solidFill>
                 <a:latin typeface="Calibri"/>
               </a:rPr>
-              <a:t>EMEA's revenue increased by $14k, the largest growth.</a:t>
-            </a:r>
-          </a:p>
-        </p:txBody>
-      </p:sp>
-      <p:sp>
-        <p:nvSpPr>
-          <p:cNvPr id="12" name="Rectangle 11"/>
-          <p:cNvSpPr/>
-          <p:nvPr/>
-        </p:nvSpPr>
-        <p:spPr>
-          <a:xfrm>
-            <a:off x="8280196" y="4754880"/>
-            <a:ext cx="3454298" cy="50800"/>
-          </a:xfrm>
-          <a:prstGeom prst="rect">
-            <a:avLst/>
-          </a:prstGeom>
-          <a:solidFill>
-            <a:srgbClr val="2E6DB4"/>
-          </a:solidFill>
-          <a:ln>
-            <a:noFill/>
-          </a:ln>
-          <a:effectLst/>
-        </p:spPr>
-        <p:style>
-          <a:lnRef idx="1">
-            <a:schemeClr val="accent1"/>
-          </a:lnRef>
-          <a:fillRef idx="3">
-            <a:schemeClr val="accent1"/>
-          </a:fillRef>
-          <a:effectRef idx="2">
-            <a:schemeClr val="accent1"/>
-          </a:effectRef>
-          <a:fontRef idx="minor">
-            <a:schemeClr val="lt1"/>
-          </a:fontRef>
-        </p:style>
-        <p:txBody>
-          <a:bodyPr rtlCol="0" anchor="ctr"/>
-          <a:lstStyle/>
-          <a:p>
-            <a:pPr algn="ctr"/>
-          </a:p>
-        </p:txBody>
-      </p:sp>
-      <p:sp>
-        <p:nvSpPr>
-          <p:cNvPr id="13" name="TextBox 12"/>
-          <p:cNvSpPr txBox="1"/>
-          <p:nvPr/>
-        </p:nvSpPr>
-        <p:spPr>
-          <a:xfrm>
-            <a:off x="8280196" y="4846320"/>
-            <a:ext cx="3454298" cy="640080"/>
-          </a:xfrm>
-          <a:prstGeom prst="rect">
-            <a:avLst/>
-          </a:prstGeom>
-          <a:noFill/>
-        </p:spPr>
-        <p:txBody>
-          <a:bodyPr wrap="square">
-            <a:spAutoFit/>
-          </a:bodyPr>
-          <a:lstStyle/>
-          <a:p>
-            <a:r>
-              <a:rPr sz="2700" b="1">
-                <a:solidFill>
-                  <a:srgbClr val="11243F"/>
-                </a:solidFill>
-                <a:latin typeface="Georgia"/>
-              </a:rPr>
-              <a:t>$202k</a:t>
-            </a:r>
-          </a:p>
-        </p:txBody>
-      </p:sp>
-      <p:sp>
-        <p:nvSpPr>
-          <p:cNvPr id="14" name="TextBox 13"/>
-          <p:cNvSpPr txBox="1"/>
-          <p:nvPr/>
-        </p:nvSpPr>
-        <p:spPr>
-          <a:xfrm>
-            <a:off x="8280196" y="5468112"/>
-            <a:ext cx="3454298" cy="1417320"/>
-          </a:xfrm>
-          <a:prstGeom prst="rect">
-            <a:avLst/>
-          </a:prstGeom>
-          <a:noFill/>
-        </p:spPr>
-        <p:txBody>
-          <a:bodyPr wrap="square">
-            <a:spAutoFit/>
-          </a:bodyPr>
-          <a:lstStyle/>
-          <a:p>
+              <a:t>•  North America: $262k, leading region in revenue.</a:t>
+            </a:r>
+          </a:p>
+          <a:p>
+            <a:pPr algn="l">
+              <a:spcAft>
+                <a:spcPts val="700"/>
+              </a:spcAft>
+            </a:pPr>
             <a:r>
               <a:rPr sz="1100" b="0">
                 <a:solidFill>
-                  <a:srgbClr val="7A828C"/>
+                  <a:srgbClr val="3C4450"/>
                 </a:solidFill>
                 <a:latin typeface="Calibri"/>
               </a:rPr>
-              <a:t>UK &amp; Ireland follows closely with $200k, also showing strong growth.</a:t>
+              <a:t>•  EMEA: $219k, biggest mover with +$14k growth.</a:t>
+            </a:r>
+          </a:p>
+          <a:p>
+            <a:pPr algn="l">
+              <a:spcAft>
+                <a:spcPts val="700"/>
+              </a:spcAft>
+            </a:pPr>
+            <a:r>
+              <a:rPr sz="1100" b="0">
+                <a:solidFill>
+                  <a:srgbClr val="3C4450"/>
+                </a:solidFill>
+                <a:latin typeface="Calibri"/>
+              </a:rPr>
+              <a:t>•  APAC contributes $202k, maintaining strong performance.</a:t>
             </a:r>
           </a:p>
         </p:txBody>
@@ -4433,11 +4521,11 @@
             <a:r>
               <a:rPr sz="3000" b="1">
                 <a:solidFill>
-                  <a:srgbClr val="11243F"/>
+                  <a:srgbClr val="163E66"/>
                 </a:solidFill>
                 <a:latin typeface="Georgia"/>
               </a:rPr>
-              <a:t>Online channel leads with $537k, growing by +$35k from prior period.</a:t>
+              <a:t>Online leads with $537k, capturing 53.8% of total revenue.</a:t>
             </a:r>
           </a:p>
         </p:txBody>
@@ -4529,7 +4617,7 @@
                 </a:solidFill>
                 <a:latin typeface="Calibri"/>
               </a:rPr>
-              <a:t>In May 2026, the Online channel generated $537k, representing 53.8% of total revenue. The In-store channel followed with $461k, showing a smaller growth of +$8k compared to the previous month. The Online channel's growth of +$35k indicates a significant upward trend, solidifying its position as the primary revenue driver.</a:t>
+              <a:t>In May 2026, Online revenue reached $537k, representing 53.8% of total revenue, while In-store revenue was $461k. The Online channel not only leads in total revenue but also showed a significant increase of +$35k compared to the previous month. In-store revenue also grew, but at a lower rate of +$8k, indicating a stronger momentum for Online sales.</a:t>
             </a:r>
           </a:p>
         </p:txBody>
@@ -4549,7 +4637,7 @@
             <a:avLst/>
           </a:prstGeom>
           <a:solidFill>
-            <a:srgbClr val="11243F"/>
+            <a:srgbClr val="163E66"/>
           </a:solidFill>
           <a:ln>
             <a:noFill/>
@@ -4641,7 +4729,7 @@
                 </a:solidFill>
                 <a:latin typeface="Calibri"/>
               </a:rPr>
-              <a:t>Focusing on enhancing the Online channel can drive further revenue growth.</a:t>
+              <a:t>The strong growth in Online revenue suggests a shift in consumer purchasing behavior favoring digital channels.</a:t>
             </a:r>
           </a:p>
           <a:p>
@@ -4657,7 +4745,7 @@
                 </a:solidFill>
                 <a:latin typeface="Calibri"/>
               </a:rPr>
-              <a:t>•  Online channel accounts for 53.8% of total revenue.</a:t>
+              <a:t>•  Online revenue increased by +$35k from April to May.</a:t>
             </a:r>
           </a:p>
           <a:p>
@@ -4673,7 +4761,7 @@
                 </a:solidFill>
                 <a:latin typeface="Calibri"/>
               </a:rPr>
-              <a:t>•  In-store channel contributes $461k, less than Online.</a:t>
+              <a:t>•  In-store revenue rose by +$8k in the same period.</a:t>
             </a:r>
           </a:p>
           <a:p>
@@ -4689,7 +4777,7 @@
                 </a:solidFill>
                 <a:latin typeface="Calibri"/>
               </a:rPr>
-              <a:t>•  Online revenue increased by +$35k, the largest growth this period.</a:t>
+              <a:t>•  Online accounts for over half of total revenue, highlighting its dominance.</a:t>
             </a:r>
           </a:p>
         </p:txBody>
@@ -4771,11 +4859,11 @@
             <a:r>
               <a:rPr sz="3000" b="1">
                 <a:solidFill>
-                  <a:srgbClr val="11243F"/>
+                  <a:srgbClr val="163E66"/>
                 </a:solidFill>
                 <a:latin typeface="Georgia"/>
               </a:rPr>
-              <a:t>Electronics leads with $293k, while Home &amp; Kitchen grows by +$24k.</a:t>
+              <a:t>Electronics leads with $293k, while Home &amp; Kitchen grows by $24k.</a:t>
             </a:r>
           </a:p>
         </p:txBody>
@@ -4867,7 +4955,7 @@
                 </a:solidFill>
                 <a:latin typeface="Calibri"/>
               </a:rPr>
-              <a:t>In May 2026, Electronics dominates with total revenue of $293k, accounting for 29.4% of overall sales. Home &amp; Kitchen follows closely with $279k, showing significant growth of +$24k compared to the previous month. Beauty &amp; Wellness also performed well, increasing by +$10k to reach $248k, while Apparel and Media &amp; Entertainment saw minimal changes.</a:t>
+              <a:t>In May 2026, Electronics generated $293k, making it the top category. Home &amp; Kitchen follows closely with $279k, showing significant growth of $24k from the previous month. Beauty &amp; Wellness also performed well, increasing by $10k to reach $248k, indicating a strong demand in these categories.</a:t>
             </a:r>
           </a:p>
         </p:txBody>
@@ -4887,7 +4975,7 @@
             <a:avLst/>
           </a:prstGeom>
           <a:solidFill>
-            <a:srgbClr val="11243F"/>
+            <a:srgbClr val="163E66"/>
           </a:solidFill>
           <a:ln>
             <a:noFill/>
@@ -4979,7 +5067,7 @@
                 </a:solidFill>
                 <a:latin typeface="Calibri"/>
               </a:rPr>
-              <a:t>Focusing on Home &amp; Kitchen's growth can enhance overall revenue performance.</a:t>
+              <a:t>The growth in Home &amp; Kitchen suggests a rising consumer preference that could drive future strategy.</a:t>
             </a:r>
           </a:p>
           <a:p>
@@ -4995,7 +5083,7 @@
                 </a:solidFill>
                 <a:latin typeface="Calibri"/>
               </a:rPr>
-              <a:t>•  Electronics: $293k, 29.4% of total revenue</a:t>
+              <a:t>•  Electronics: $293k, leading category</a:t>
             </a:r>
           </a:p>
           <a:p>
@@ -5109,7 +5197,7 @@
             <a:r>
               <a:rPr sz="3000" b="1">
                 <a:solidFill>
-                  <a:srgbClr val="11243F"/>
+                  <a:srgbClr val="163E66"/>
                 </a:solidFill>
                 <a:latin typeface="Georgia"/>
               </a:rPr>
@@ -5205,7 +5293,7 @@
                 </a:solidFill>
                 <a:latin typeface="Calibri"/>
               </a:rPr>
-              <a:t>In May 2026, Wireless Earbuds generated $163k, making it the top product by revenue. The Air Fryer followed with $133k, showing the largest growth of $15k from the previous month. This highlights a strong concentration in the top two products, which together account for a significant portion of total revenue.</a:t>
+              <a:t>In May 2026, Wireless Earbuds generated $163k, making it the top product by revenue. The Air Fryer followed with $133k, showing significant growth of $15k from the previous month. This indicates a strong concentration in the top two products, which together account for a substantial portion of total sales.</a:t>
             </a:r>
           </a:p>
         </p:txBody>
@@ -5225,7 +5313,7 @@
             <a:avLst/>
           </a:prstGeom>
           <a:solidFill>
-            <a:srgbClr val="11243F"/>
+            <a:srgbClr val="163E66"/>
           </a:solidFill>
           <a:ln>
             <a:noFill/>
@@ -5317,7 +5405,7 @@
                 </a:solidFill>
                 <a:latin typeface="Calibri"/>
               </a:rPr>
-              <a:t>Focusing on top-performing products can drive further revenue growth.</a:t>
+              <a:t>Focusing on high-performing products like Wireless Earbuds and Air Fryer can drive future growth.</a:t>
             </a:r>
           </a:p>
           <a:p>
@@ -5349,7 +5437,7 @@
                 </a:solidFill>
                 <a:latin typeface="Calibri"/>
               </a:rPr>
-              <a:t>•  Air Fryer shows the most growth with a $15k increase.</a:t>
+              <a:t>•  Air Fryer shows the largest growth with an increase of $15k.</a:t>
             </a:r>
           </a:p>
           <a:p>
@@ -5365,7 +5453,7 @@
                 </a:solidFill>
                 <a:latin typeface="Calibri"/>
               </a:rPr>
-              <a:t>•  Top two products represent a substantial revenue concentration.</a:t>
+              <a:t>•  Top two products represent a significant revenue concentration.</a:t>
             </a:r>
           </a:p>
         </p:txBody>
@@ -5447,7 +5535,7 @@
             <a:r>
               <a:rPr sz="3000" b="1">
                 <a:solidFill>
-                  <a:srgbClr val="11243F"/>
+                  <a:srgbClr val="163E66"/>
                 </a:solidFill>
                 <a:latin typeface="Georgia"/>
               </a:rPr>
@@ -5524,7 +5612,7 @@
                 </a:solidFill>
                 <a:latin typeface="Calibri"/>
               </a:rPr>
-              <a:t>1.   Enhance online marketing strategies to capitalize on the $537k from the Online channel.</a:t>
+              <a:t>1.   Increase online marketing efforts to boost the $537k from the online channel.</a:t>
             </a:r>
           </a:p>
           <a:p>
@@ -5540,7 +5628,7 @@
                 </a:solidFill>
                 <a:latin typeface="Calibri"/>
               </a:rPr>
-              <a:t>2.   Increase inventory for Wireless Earbuds to support the $163k sales momentum.</a:t>
+              <a:t>2.   Focus on promoting the Wireless Earbuds, which generated $163k, to maximize sales.</a:t>
             </a:r>
           </a:p>
           <a:p>
@@ -5556,7 +5644,7 @@
                 </a:solidFill>
                 <a:latin typeface="Calibri"/>
               </a:rPr>
-              <a:t>3.   Investigate the decline of Coffee Grinder to identify causes and implement corrective actions.</a:t>
+              <a:t>3.   Investigate the decline of the Coffee Grinder, which decreased by -$2k, and implement corrective actions.</a:t>
             </a:r>
           </a:p>
           <a:p>
@@ -5572,7 +5660,7 @@
                 </a:solidFill>
                 <a:latin typeface="Calibri"/>
               </a:rPr>
-              <a:t>4.   Focus on expanding the Electronics category, which contributes $293k, to drive further growth.</a:t>
+              <a:t>4.   Expand product offerings in the Electronics category, currently at $293k, to capture more market share.</a:t>
             </a:r>
           </a:p>
         </p:txBody>

--- a/app/examples/retail_sales/report.pptx
+++ b/app/examples/retail_sales/report.pptx
@@ -3147,8 +3147,8 @@
         </p:nvSpPr>
         <p:spPr>
           <a:xfrm>
-            <a:off x="777240" y="777240"/>
-            <a:ext cx="10607040" cy="1828800"/>
+            <a:off x="777240" y="914400"/>
+            <a:ext cx="10607040" cy="5029200"/>
           </a:xfrm>
           <a:prstGeom prst="rect">
             <a:avLst/>
@@ -3156,11 +3156,16 @@
           <a:noFill/>
         </p:spPr>
         <p:txBody>
-          <a:bodyPr wrap="square">
+          <a:bodyPr wrap="square" anchor="ctr">
             <a:spAutoFit/>
           </a:bodyPr>
           <a:lstStyle/>
           <a:p>
+            <a:pPr>
+              <a:spcAft>
+                <a:spcPts val="1400"/>
+              </a:spcAft>
+            </a:pPr>
             <a:r>
               <a:rPr sz="4600" b="1">
                 <a:solidFill>
@@ -3171,73 +3176,6 @@
               <a:t>May 2026 Revenue Performance</a:t>
             </a:r>
           </a:p>
-        </p:txBody>
-      </p:sp>
-      <p:sp>
-        <p:nvSpPr>
-          <p:cNvPr id="4" name="Rectangle 3"/>
-          <p:cNvSpPr/>
-          <p:nvPr/>
-        </p:nvSpPr>
-        <p:spPr>
-          <a:xfrm>
-            <a:off x="822960" y="2743200"/>
-            <a:ext cx="1554480" cy="76200"/>
-          </a:xfrm>
-          <a:prstGeom prst="rect">
-            <a:avLst/>
-          </a:prstGeom>
-          <a:solidFill>
-            <a:srgbClr val="2E6DB4"/>
-          </a:solidFill>
-          <a:ln>
-            <a:noFill/>
-          </a:ln>
-          <a:effectLst/>
-        </p:spPr>
-        <p:style>
-          <a:lnRef idx="1">
-            <a:schemeClr val="accent1"/>
-          </a:lnRef>
-          <a:fillRef idx="3">
-            <a:schemeClr val="accent1"/>
-          </a:fillRef>
-          <a:effectRef idx="2">
-            <a:schemeClr val="accent1"/>
-          </a:effectRef>
-          <a:fontRef idx="minor">
-            <a:schemeClr val="lt1"/>
-          </a:fontRef>
-        </p:style>
-        <p:txBody>
-          <a:bodyPr rtlCol="0" anchor="ctr"/>
-          <a:lstStyle/>
-          <a:p>
-            <a:pPr algn="ctr"/>
-          </a:p>
-        </p:txBody>
-      </p:sp>
-      <p:sp>
-        <p:nvSpPr>
-          <p:cNvPr id="5" name="TextBox 4"/>
-          <p:cNvSpPr txBox="1"/>
-          <p:nvPr/>
-        </p:nvSpPr>
-        <p:spPr>
-          <a:xfrm>
-            <a:off x="777240" y="2971800"/>
-            <a:ext cx="10607040" cy="548640"/>
-          </a:xfrm>
-          <a:prstGeom prst="rect">
-            <a:avLst/>
-          </a:prstGeom>
-          <a:noFill/>
-        </p:spPr>
-        <p:txBody>
-          <a:bodyPr wrap="square">
-            <a:spAutoFit/>
-          </a:bodyPr>
-          <a:lstStyle/>
           <a:p>
             <a:r>
               <a:rPr sz="1700" b="0">
